--- a/slides/wek8.pptx
+++ b/slides/wek8.pptx
@@ -1,49 +1,45 @@
 
 <file path=ppt/presentation.xml><?xml version="1.0" encoding="utf-8"?>
-<p:presentation xmlns:a="http://schemas.openxmlformats.org/drawingml/2006/main" xmlns:r="http://schemas.openxmlformats.org/officeDocument/2006/relationships" xmlns:p="http://schemas.openxmlformats.org/presentationml/2006/main" saveSubsetFonts="1" embedTrueTypeFonts="true">
+<p:presentation xmlns:a="http://schemas.openxmlformats.org/drawingml/2006/main" xmlns:r="http://schemas.openxmlformats.org/officeDocument/2006/relationships" xmlns:p="http://schemas.openxmlformats.org/presentationml/2006/main" embedTrueTypeFonts="1" saveSubsetFonts="1">
   <p:sldMasterIdLst>
     <p:sldMasterId id="2147483648" r:id="rId1"/>
   </p:sldMasterIdLst>
   <p:sldIdLst>
-    <p:sldId id="256" r:id="rId6"/>
-    <p:sldId id="257" r:id="rId7"/>
-    <p:sldId id="258" r:id="rId8"/>
-    <p:sldId id="259" r:id="rId9"/>
-    <p:sldId id="260" r:id="rId10"/>
-    <p:sldId id="261" r:id="rId11"/>
-    <p:sldId id="262" r:id="rId12"/>
-    <p:sldId id="263" r:id="rId13"/>
-    <p:sldId id="264" r:id="rId14"/>
-    <p:sldId id="265" r:id="rId15"/>
-    <p:sldId id="266" r:id="rId16"/>
-    <p:sldId id="267" r:id="rId17"/>
+    <p:sldId id="256" r:id="rId2"/>
+    <p:sldId id="257" r:id="rId3"/>
+    <p:sldId id="258" r:id="rId4"/>
+    <p:sldId id="259" r:id="rId5"/>
+    <p:sldId id="260" r:id="rId6"/>
+    <p:sldId id="261" r:id="rId7"/>
+    <p:sldId id="262" r:id="rId8"/>
+    <p:sldId id="263" r:id="rId9"/>
+    <p:sldId id="264" r:id="rId10"/>
+    <p:sldId id="265" r:id="rId11"/>
+    <p:sldId id="266" r:id="rId12"/>
+    <p:sldId id="267" r:id="rId13"/>
   </p:sldIdLst>
   <p:sldSz cx="18288000" cy="10287000"/>
   <p:notesSz cx="6858000" cy="9144000"/>
   <p:embeddedFontLst>
     <p:embeddedFont>
-      <p:font typeface="League Spartan" charset="1" panose="00000800000000000000"/>
-      <p:regular r:id="rId18"/>
+      <p:font typeface="Arial Nova Bold" panose="020B0604020202020204" charset="0"/>
+      <p:regular r:id="rId14"/>
     </p:embeddedFont>
     <p:embeddedFont>
-      <p:font typeface="Muli Bold" charset="1" panose="00000800000000000000"/>
-      <p:regular r:id="rId19"/>
+      <p:font typeface="League Spartan" panose="020B0604020202020204" charset="0"/>
+      <p:regular r:id="rId15"/>
     </p:embeddedFont>
     <p:embeddedFont>
-      <p:font typeface="Muli" charset="1" panose="00000500000000000000"/>
-      <p:regular r:id="rId20"/>
+      <p:font typeface="Muli" panose="020B0604020202020204" charset="0"/>
+      <p:regular r:id="rId16"/>
     </p:embeddedFont>
     <p:embeddedFont>
-      <p:font typeface="Noto Sans" charset="1" panose="020B0502040504020204"/>
-      <p:regular r:id="rId21"/>
+      <p:font typeface="Muli Bold" panose="020B0604020202020204" charset="0"/>
+      <p:regular r:id="rId17"/>
     </p:embeddedFont>
     <p:embeddedFont>
-      <p:font typeface="Arial Nova Bold" charset="1" panose="020B0804020202020204"/>
-      <p:regular r:id="rId22"/>
-    </p:embeddedFont>
-    <p:embeddedFont>
-      <p:font typeface="Arial" charset="1" panose="020B0604020202020204"/>
-      <p:regular r:id="rId23"/>
+      <p:font typeface="Noto Sans" panose="020B0502040204020203" pitchFamily="34" charset="0"/>
+      <p:regular r:id="rId18"/>
     </p:embeddedFont>
   </p:embeddedFontLst>
   <p:defaultTextStyle>
@@ -141,7 +137,52 @@
       </a:defRPr>
     </a:lvl9pPr>
   </p:defaultTextStyle>
+  <p:extLst>
+    <p:ext uri="{EFAFB233-063F-42B5-8137-9DF3F51BA10A}">
+      <p15:sldGuideLst xmlns:p15="http://schemas.microsoft.com/office/powerpoint/2012/main">
+        <p15:guide id="1" orient="horz" pos="2160">
+          <p15:clr>
+            <a:srgbClr val="A4A3A4"/>
+          </p15:clr>
+        </p15:guide>
+        <p15:guide id="2" pos="2880">
+          <p15:clr>
+            <a:srgbClr val="A4A3A4"/>
+          </p15:clr>
+        </p15:guide>
+      </p15:sldGuideLst>
+    </p:ext>
+  </p:extLst>
 </p:presentation>
+</file>
+
+<file path=ppt/changesInfos/changesInfo1.xml><?xml version="1.0" encoding="utf-8"?>
+<pc:chgInfo xmlns:a="http://schemas.openxmlformats.org/drawingml/2006/main" xmlns:r="http://schemas.openxmlformats.org/officeDocument/2006/relationships" xmlns:ac="http://schemas.microsoft.com/office/drawing/2013/main/command" xmlns:pc="http://schemas.microsoft.com/office/powerpoint/2013/main/command">
+  <pc:docChgLst>
+    <pc:chgData name="Ánh Dương Nguyễn Đỗ" userId="b8827725017ffd42" providerId="LiveId" clId="{28981AB8-99E3-4CDC-A9B0-6439E79686A4}"/>
+    <pc:docChg chg="modSld">
+      <pc:chgData name="Ánh Dương Nguyễn Đỗ" userId="b8827725017ffd42" providerId="LiveId" clId="{28981AB8-99E3-4CDC-A9B0-6439E79686A4}" dt="2026-05-11T15:18:49.125" v="0" actId="1076"/>
+      <pc:docMkLst>
+        <pc:docMk/>
+      </pc:docMkLst>
+      <pc:sldChg chg="modSp mod">
+        <pc:chgData name="Ánh Dương Nguyễn Đỗ" userId="b8827725017ffd42" providerId="LiveId" clId="{28981AB8-99E3-4CDC-A9B0-6439E79686A4}" dt="2026-05-11T15:18:49.125" v="0" actId="1076"/>
+        <pc:sldMkLst>
+          <pc:docMk/>
+          <pc:sldMk cId="0" sldId="264"/>
+        </pc:sldMkLst>
+        <pc:spChg chg="mod">
+          <ac:chgData name="Ánh Dương Nguyễn Đỗ" userId="b8827725017ffd42" providerId="LiveId" clId="{28981AB8-99E3-4CDC-A9B0-6439E79686A4}" dt="2026-05-11T15:18:49.125" v="0" actId="1076"/>
+          <ac:spMkLst>
+            <pc:docMk/>
+            <pc:sldMk cId="0" sldId="264"/>
+            <ac:spMk id="4" creationId="{00000000-0000-0000-0000-000000000000}"/>
+          </ac:spMkLst>
+        </pc:spChg>
+      </pc:sldChg>
+    </pc:docChg>
+  </pc:docChgLst>
+</pc:chgInfo>
 </file>
 
 <file path=ppt/slideLayouts/slideLayout1.xml><?xml version="1.0" encoding="utf-8"?>
@@ -182,10 +223,9 @@
           <a:lstStyle/>
           <a:p>
             <a:r>
-              <a:rPr lang="en-US" smtClean="0"/>
+              <a:rPr lang="en-US"/>
               <a:t>Click to edit Master title style</a:t>
             </a:r>
-            <a:endParaRPr lang="en-US"/>
           </a:p>
         </p:txBody>
       </p:sp>
@@ -301,10 +341,9 @@
           </a:lstStyle>
           <a:p>
             <a:r>
-              <a:rPr lang="en-US" smtClean="0"/>
+              <a:rPr lang="en-US"/>
               <a:t>Click to edit Master subtitle style</a:t>
             </a:r>
-            <a:endParaRPr lang="en-US"/>
           </a:p>
         </p:txBody>
       </p:sp>
@@ -326,7 +365,7 @@
             <a:fld id="{1D8BD707-D9CF-40AE-B4C6-C98DA3205C09}" type="datetimeFigureOut">
               <a:rPr lang="en-US" smtClean="0"/>
               <a:pPr/>
-              <a:t>8/1/2011</a:t>
+              <a:t>5/11/2026</a:t>
             </a:fld>
             <a:endParaRPr lang="en-US"/>
           </a:p>
@@ -416,10 +455,9 @@
           <a:lstStyle/>
           <a:p>
             <a:r>
-              <a:rPr lang="en-US" smtClean="0"/>
+              <a:rPr lang="en-US"/>
               <a:t>Click to edit Master title style</a:t>
             </a:r>
-            <a:endParaRPr lang="en-US"/>
           </a:p>
         </p:txBody>
       </p:sp>
@@ -440,38 +478,37 @@
           <a:p>
             <a:pPr lvl="0"/>
             <a:r>
-              <a:rPr lang="en-US" smtClean="0"/>
+              <a:rPr lang="en-US"/>
               <a:t>Click to edit Master text styles</a:t>
             </a:r>
           </a:p>
           <a:p>
             <a:pPr lvl="1"/>
             <a:r>
-              <a:rPr lang="en-US" smtClean="0"/>
+              <a:rPr lang="en-US"/>
               <a:t>Second level</a:t>
             </a:r>
           </a:p>
           <a:p>
             <a:pPr lvl="2"/>
             <a:r>
-              <a:rPr lang="en-US" smtClean="0"/>
+              <a:rPr lang="en-US"/>
               <a:t>Third level</a:t>
             </a:r>
           </a:p>
           <a:p>
             <a:pPr lvl="3"/>
             <a:r>
-              <a:rPr lang="en-US" smtClean="0"/>
+              <a:rPr lang="en-US"/>
               <a:t>Fourth level</a:t>
             </a:r>
           </a:p>
           <a:p>
             <a:pPr lvl="4"/>
             <a:r>
-              <a:rPr lang="en-US" smtClean="0"/>
+              <a:rPr lang="en-US"/>
               <a:t>Fifth level</a:t>
             </a:r>
-            <a:endParaRPr lang="en-US"/>
           </a:p>
         </p:txBody>
       </p:sp>
@@ -493,7 +530,7 @@
             <a:fld id="{1D8BD707-D9CF-40AE-B4C6-C98DA3205C09}" type="datetimeFigureOut">
               <a:rPr lang="en-US" smtClean="0"/>
               <a:pPr/>
-              <a:t>8/1/2011</a:t>
+              <a:t>5/11/2026</a:t>
             </a:fld>
             <a:endParaRPr lang="en-US"/>
           </a:p>
@@ -588,10 +625,9 @@
           <a:lstStyle/>
           <a:p>
             <a:r>
-              <a:rPr lang="en-US" smtClean="0"/>
+              <a:rPr lang="en-US"/>
               <a:t>Click to edit Master title style</a:t>
             </a:r>
-            <a:endParaRPr lang="en-US"/>
           </a:p>
         </p:txBody>
       </p:sp>
@@ -617,38 +653,37 @@
           <a:p>
             <a:pPr lvl="0"/>
             <a:r>
-              <a:rPr lang="en-US" smtClean="0"/>
+              <a:rPr lang="en-US"/>
               <a:t>Click to edit Master text styles</a:t>
             </a:r>
           </a:p>
           <a:p>
             <a:pPr lvl="1"/>
             <a:r>
-              <a:rPr lang="en-US" smtClean="0"/>
+              <a:rPr lang="en-US"/>
               <a:t>Second level</a:t>
             </a:r>
           </a:p>
           <a:p>
             <a:pPr lvl="2"/>
             <a:r>
-              <a:rPr lang="en-US" smtClean="0"/>
+              <a:rPr lang="en-US"/>
               <a:t>Third level</a:t>
             </a:r>
           </a:p>
           <a:p>
             <a:pPr lvl="3"/>
             <a:r>
-              <a:rPr lang="en-US" smtClean="0"/>
+              <a:rPr lang="en-US"/>
               <a:t>Fourth level</a:t>
             </a:r>
           </a:p>
           <a:p>
             <a:pPr lvl="4"/>
             <a:r>
-              <a:rPr lang="en-US" smtClean="0"/>
+              <a:rPr lang="en-US"/>
               <a:t>Fifth level</a:t>
             </a:r>
-            <a:endParaRPr lang="en-US"/>
           </a:p>
         </p:txBody>
       </p:sp>
@@ -670,7 +705,7 @@
             <a:fld id="{1D8BD707-D9CF-40AE-B4C6-C98DA3205C09}" type="datetimeFigureOut">
               <a:rPr lang="en-US" smtClean="0"/>
               <a:pPr/>
-              <a:t>8/1/2011</a:t>
+              <a:t>5/11/2026</a:t>
             </a:fld>
             <a:endParaRPr lang="en-US"/>
           </a:p>
@@ -760,10 +795,9 @@
           <a:lstStyle/>
           <a:p>
             <a:r>
-              <a:rPr lang="en-US" smtClean="0"/>
+              <a:rPr lang="en-US"/>
               <a:t>Click to edit Master title style</a:t>
             </a:r>
-            <a:endParaRPr lang="en-US"/>
           </a:p>
         </p:txBody>
       </p:sp>
@@ -784,38 +818,37 @@
           <a:p>
             <a:pPr lvl="0"/>
             <a:r>
-              <a:rPr lang="en-US" smtClean="0"/>
+              <a:rPr lang="en-US"/>
               <a:t>Click to edit Master text styles</a:t>
             </a:r>
           </a:p>
           <a:p>
             <a:pPr lvl="1"/>
             <a:r>
-              <a:rPr lang="en-US" smtClean="0"/>
+              <a:rPr lang="en-US"/>
               <a:t>Second level</a:t>
             </a:r>
           </a:p>
           <a:p>
             <a:pPr lvl="2"/>
             <a:r>
-              <a:rPr lang="en-US" smtClean="0"/>
+              <a:rPr lang="en-US"/>
               <a:t>Third level</a:t>
             </a:r>
           </a:p>
           <a:p>
             <a:pPr lvl="3"/>
             <a:r>
-              <a:rPr lang="en-US" smtClean="0"/>
+              <a:rPr lang="en-US"/>
               <a:t>Fourth level</a:t>
             </a:r>
           </a:p>
           <a:p>
             <a:pPr lvl="4"/>
             <a:r>
-              <a:rPr lang="en-US" smtClean="0"/>
+              <a:rPr lang="en-US"/>
               <a:t>Fifth level</a:t>
             </a:r>
-            <a:endParaRPr lang="en-US"/>
           </a:p>
         </p:txBody>
       </p:sp>
@@ -837,7 +870,7 @@
             <a:fld id="{1D8BD707-D9CF-40AE-B4C6-C98DA3205C09}" type="datetimeFigureOut">
               <a:rPr lang="en-US" smtClean="0"/>
               <a:pPr/>
-              <a:t>8/1/2011</a:t>
+              <a:t>5/11/2026</a:t>
             </a:fld>
             <a:endParaRPr lang="en-US"/>
           </a:p>
@@ -936,10 +969,9 @@
           </a:lstStyle>
           <a:p>
             <a:r>
-              <a:rPr lang="en-US" smtClean="0"/>
+              <a:rPr lang="en-US"/>
               <a:t>Click to edit Master title style</a:t>
             </a:r>
-            <a:endParaRPr lang="en-US"/>
           </a:p>
         </p:txBody>
       </p:sp>
@@ -1056,7 +1088,7 @@
           <a:p>
             <a:pPr lvl="0"/>
             <a:r>
-              <a:rPr lang="en-US" smtClean="0"/>
+              <a:rPr lang="en-US"/>
               <a:t>Click to edit Master text styles</a:t>
             </a:r>
           </a:p>
@@ -1080,7 +1112,7 @@
             <a:fld id="{1D8BD707-D9CF-40AE-B4C6-C98DA3205C09}" type="datetimeFigureOut">
               <a:rPr lang="en-US" smtClean="0"/>
               <a:pPr/>
-              <a:t>8/1/2011</a:t>
+              <a:t>5/11/2026</a:t>
             </a:fld>
             <a:endParaRPr lang="en-US"/>
           </a:p>
@@ -1170,10 +1202,9 @@
           <a:lstStyle/>
           <a:p>
             <a:r>
-              <a:rPr lang="en-US" smtClean="0"/>
+              <a:rPr lang="en-US"/>
               <a:t>Click to edit Master title style</a:t>
             </a:r>
-            <a:endParaRPr lang="en-US"/>
           </a:p>
         </p:txBody>
       </p:sp>
@@ -1227,38 +1258,37 @@
           <a:p>
             <a:pPr lvl="0"/>
             <a:r>
-              <a:rPr lang="en-US" smtClean="0"/>
+              <a:rPr lang="en-US"/>
               <a:t>Click to edit Master text styles</a:t>
             </a:r>
           </a:p>
           <a:p>
             <a:pPr lvl="1"/>
             <a:r>
-              <a:rPr lang="en-US" smtClean="0"/>
+              <a:rPr lang="en-US"/>
               <a:t>Second level</a:t>
             </a:r>
           </a:p>
           <a:p>
             <a:pPr lvl="2"/>
             <a:r>
-              <a:rPr lang="en-US" smtClean="0"/>
+              <a:rPr lang="en-US"/>
               <a:t>Third level</a:t>
             </a:r>
           </a:p>
           <a:p>
             <a:pPr lvl="3"/>
             <a:r>
-              <a:rPr lang="en-US" smtClean="0"/>
+              <a:rPr lang="en-US"/>
               <a:t>Fourth level</a:t>
             </a:r>
           </a:p>
           <a:p>
             <a:pPr lvl="4"/>
             <a:r>
-              <a:rPr lang="en-US" smtClean="0"/>
+              <a:rPr lang="en-US"/>
               <a:t>Fifth level</a:t>
             </a:r>
-            <a:endParaRPr lang="en-US"/>
           </a:p>
         </p:txBody>
       </p:sp>
@@ -1312,38 +1342,37 @@
           <a:p>
             <a:pPr lvl="0"/>
             <a:r>
-              <a:rPr lang="en-US" smtClean="0"/>
+              <a:rPr lang="en-US"/>
               <a:t>Click to edit Master text styles</a:t>
             </a:r>
           </a:p>
           <a:p>
             <a:pPr lvl="1"/>
             <a:r>
-              <a:rPr lang="en-US" smtClean="0"/>
+              <a:rPr lang="en-US"/>
               <a:t>Second level</a:t>
             </a:r>
           </a:p>
           <a:p>
             <a:pPr lvl="2"/>
             <a:r>
-              <a:rPr lang="en-US" smtClean="0"/>
+              <a:rPr lang="en-US"/>
               <a:t>Third level</a:t>
             </a:r>
           </a:p>
           <a:p>
             <a:pPr lvl="3"/>
             <a:r>
-              <a:rPr lang="en-US" smtClean="0"/>
+              <a:rPr lang="en-US"/>
               <a:t>Fourth level</a:t>
             </a:r>
           </a:p>
           <a:p>
             <a:pPr lvl="4"/>
             <a:r>
-              <a:rPr lang="en-US" smtClean="0"/>
+              <a:rPr lang="en-US"/>
               <a:t>Fifth level</a:t>
             </a:r>
-            <a:endParaRPr lang="en-US"/>
           </a:p>
         </p:txBody>
       </p:sp>
@@ -1365,7 +1394,7 @@
             <a:fld id="{1D8BD707-D9CF-40AE-B4C6-C98DA3205C09}" type="datetimeFigureOut">
               <a:rPr lang="en-US" smtClean="0"/>
               <a:pPr/>
-              <a:t>8/1/2011</a:t>
+              <a:t>5/11/2026</a:t>
             </a:fld>
             <a:endParaRPr lang="en-US"/>
           </a:p>
@@ -1459,10 +1488,9 @@
           </a:lstStyle>
           <a:p>
             <a:r>
-              <a:rPr lang="en-US" smtClean="0"/>
+              <a:rPr lang="en-US"/>
               <a:t>Click to edit Master title style</a:t>
             </a:r>
-            <a:endParaRPr lang="en-US"/>
           </a:p>
         </p:txBody>
       </p:sp>
@@ -1525,7 +1553,7 @@
           <a:p>
             <a:pPr lvl="0"/>
             <a:r>
-              <a:rPr lang="en-US" smtClean="0"/>
+              <a:rPr lang="en-US"/>
               <a:t>Click to edit Master text styles</a:t>
             </a:r>
           </a:p>
@@ -1581,38 +1609,37 @@
           <a:p>
             <a:pPr lvl="0"/>
             <a:r>
-              <a:rPr lang="en-US" smtClean="0"/>
+              <a:rPr lang="en-US"/>
               <a:t>Click to edit Master text styles</a:t>
             </a:r>
           </a:p>
           <a:p>
             <a:pPr lvl="1"/>
             <a:r>
-              <a:rPr lang="en-US" smtClean="0"/>
+              <a:rPr lang="en-US"/>
               <a:t>Second level</a:t>
             </a:r>
           </a:p>
           <a:p>
             <a:pPr lvl="2"/>
             <a:r>
-              <a:rPr lang="en-US" smtClean="0"/>
+              <a:rPr lang="en-US"/>
               <a:t>Third level</a:t>
             </a:r>
           </a:p>
           <a:p>
             <a:pPr lvl="3"/>
             <a:r>
-              <a:rPr lang="en-US" smtClean="0"/>
+              <a:rPr lang="en-US"/>
               <a:t>Fourth level</a:t>
             </a:r>
           </a:p>
           <a:p>
             <a:pPr lvl="4"/>
             <a:r>
-              <a:rPr lang="en-US" smtClean="0"/>
+              <a:rPr lang="en-US"/>
               <a:t>Fifth level</a:t>
             </a:r>
-            <a:endParaRPr lang="en-US"/>
           </a:p>
         </p:txBody>
       </p:sp>
@@ -1675,7 +1702,7 @@
           <a:p>
             <a:pPr lvl="0"/>
             <a:r>
-              <a:rPr lang="en-US" smtClean="0"/>
+              <a:rPr lang="en-US"/>
               <a:t>Click to edit Master text styles</a:t>
             </a:r>
           </a:p>
@@ -1731,38 +1758,37 @@
           <a:p>
             <a:pPr lvl="0"/>
             <a:r>
-              <a:rPr lang="en-US" smtClean="0"/>
+              <a:rPr lang="en-US"/>
               <a:t>Click to edit Master text styles</a:t>
             </a:r>
           </a:p>
           <a:p>
             <a:pPr lvl="1"/>
             <a:r>
-              <a:rPr lang="en-US" smtClean="0"/>
+              <a:rPr lang="en-US"/>
               <a:t>Second level</a:t>
             </a:r>
           </a:p>
           <a:p>
             <a:pPr lvl="2"/>
             <a:r>
-              <a:rPr lang="en-US" smtClean="0"/>
+              <a:rPr lang="en-US"/>
               <a:t>Third level</a:t>
             </a:r>
           </a:p>
           <a:p>
             <a:pPr lvl="3"/>
             <a:r>
-              <a:rPr lang="en-US" smtClean="0"/>
+              <a:rPr lang="en-US"/>
               <a:t>Fourth level</a:t>
             </a:r>
           </a:p>
           <a:p>
             <a:pPr lvl="4"/>
             <a:r>
-              <a:rPr lang="en-US" smtClean="0"/>
+              <a:rPr lang="en-US"/>
               <a:t>Fifth level</a:t>
             </a:r>
-            <a:endParaRPr lang="en-US"/>
           </a:p>
         </p:txBody>
       </p:sp>
@@ -1784,7 +1810,7 @@
             <a:fld id="{1D8BD707-D9CF-40AE-B4C6-C98DA3205C09}" type="datetimeFigureOut">
               <a:rPr lang="en-US" smtClean="0"/>
               <a:pPr/>
-              <a:t>8/1/2011</a:t>
+              <a:t>5/11/2026</a:t>
             </a:fld>
             <a:endParaRPr lang="en-US"/>
           </a:p>
@@ -1874,10 +1900,9 @@
           <a:lstStyle/>
           <a:p>
             <a:r>
-              <a:rPr lang="en-US" smtClean="0"/>
+              <a:rPr lang="en-US"/>
               <a:t>Click to edit Master title style</a:t>
             </a:r>
-            <a:endParaRPr lang="en-US"/>
           </a:p>
         </p:txBody>
       </p:sp>
@@ -1899,7 +1924,7 @@
             <a:fld id="{1D8BD707-D9CF-40AE-B4C6-C98DA3205C09}" type="datetimeFigureOut">
               <a:rPr lang="en-US" smtClean="0"/>
               <a:pPr/>
-              <a:t>8/1/2011</a:t>
+              <a:t>5/11/2026</a:t>
             </a:fld>
             <a:endParaRPr lang="en-US"/>
           </a:p>
@@ -1991,7 +2016,7 @@
             <a:fld id="{1D8BD707-D9CF-40AE-B4C6-C98DA3205C09}" type="datetimeFigureOut">
               <a:rPr lang="en-US" smtClean="0"/>
               <a:pPr/>
-              <a:t>8/1/2011</a:t>
+              <a:t>5/11/2026</a:t>
             </a:fld>
             <a:endParaRPr lang="en-US"/>
           </a:p>
@@ -2090,10 +2115,9 @@
           </a:lstStyle>
           <a:p>
             <a:r>
-              <a:rPr lang="en-US" smtClean="0"/>
+              <a:rPr lang="en-US"/>
               <a:t>Click to edit Master title style</a:t>
             </a:r>
-            <a:endParaRPr lang="en-US"/>
           </a:p>
         </p:txBody>
       </p:sp>
@@ -2147,38 +2171,37 @@
           <a:p>
             <a:pPr lvl="0"/>
             <a:r>
-              <a:rPr lang="en-US" smtClean="0"/>
+              <a:rPr lang="en-US"/>
               <a:t>Click to edit Master text styles</a:t>
             </a:r>
           </a:p>
           <a:p>
             <a:pPr lvl="1"/>
             <a:r>
-              <a:rPr lang="en-US" smtClean="0"/>
+              <a:rPr lang="en-US"/>
               <a:t>Second level</a:t>
             </a:r>
           </a:p>
           <a:p>
             <a:pPr lvl="2"/>
             <a:r>
-              <a:rPr lang="en-US" smtClean="0"/>
+              <a:rPr lang="en-US"/>
               <a:t>Third level</a:t>
             </a:r>
           </a:p>
           <a:p>
             <a:pPr lvl="3"/>
             <a:r>
-              <a:rPr lang="en-US" smtClean="0"/>
+              <a:rPr lang="en-US"/>
               <a:t>Fourth level</a:t>
             </a:r>
           </a:p>
           <a:p>
             <a:pPr lvl="4"/>
             <a:r>
-              <a:rPr lang="en-US" smtClean="0"/>
+              <a:rPr lang="en-US"/>
               <a:t>Fifth level</a:t>
             </a:r>
-            <a:endParaRPr lang="en-US"/>
           </a:p>
         </p:txBody>
       </p:sp>
@@ -2241,7 +2264,7 @@
           <a:p>
             <a:pPr lvl="0"/>
             <a:r>
-              <a:rPr lang="en-US" smtClean="0"/>
+              <a:rPr lang="en-US"/>
               <a:t>Click to edit Master text styles</a:t>
             </a:r>
           </a:p>
@@ -2265,7 +2288,7 @@
             <a:fld id="{1D8BD707-D9CF-40AE-B4C6-C98DA3205C09}" type="datetimeFigureOut">
               <a:rPr lang="en-US" smtClean="0"/>
               <a:pPr/>
-              <a:t>8/1/2011</a:t>
+              <a:t>5/11/2026</a:t>
             </a:fld>
             <a:endParaRPr lang="en-US"/>
           </a:p>
@@ -2364,10 +2387,9 @@
           </a:lstStyle>
           <a:p>
             <a:r>
-              <a:rPr lang="en-US" smtClean="0"/>
+              <a:rPr lang="en-US"/>
               <a:t>Click to edit Master title style</a:t>
             </a:r>
-            <a:endParaRPr lang="en-US"/>
           </a:p>
         </p:txBody>
       </p:sp>
@@ -2491,7 +2513,7 @@
           <a:p>
             <a:pPr lvl="0"/>
             <a:r>
-              <a:rPr lang="en-US" smtClean="0"/>
+              <a:rPr lang="en-US"/>
               <a:t>Click to edit Master text styles</a:t>
             </a:r>
           </a:p>
@@ -2515,7 +2537,7 @@
             <a:fld id="{1D8BD707-D9CF-40AE-B4C6-C98DA3205C09}" type="datetimeFigureOut">
               <a:rPr lang="en-US" smtClean="0"/>
               <a:pPr/>
-              <a:t>8/1/2011</a:t>
+              <a:t>5/11/2026</a:t>
             </a:fld>
             <a:endParaRPr lang="en-US"/>
           </a:p>
@@ -2620,10 +2642,9 @@
           <a:lstStyle/>
           <a:p>
             <a:r>
-              <a:rPr lang="en-US" smtClean="0"/>
+              <a:rPr lang="en-US"/>
               <a:t>Click to edit Master title style</a:t>
             </a:r>
-            <a:endParaRPr lang="en-US"/>
           </a:p>
         </p:txBody>
       </p:sp>
@@ -2654,38 +2675,37 @@
           <a:p>
             <a:pPr lvl="0"/>
             <a:r>
-              <a:rPr lang="en-US" smtClean="0"/>
+              <a:rPr lang="en-US"/>
               <a:t>Click to edit Master text styles</a:t>
             </a:r>
           </a:p>
           <a:p>
             <a:pPr lvl="1"/>
             <a:r>
-              <a:rPr lang="en-US" smtClean="0"/>
+              <a:rPr lang="en-US"/>
               <a:t>Second level</a:t>
             </a:r>
           </a:p>
           <a:p>
             <a:pPr lvl="2"/>
             <a:r>
-              <a:rPr lang="en-US" smtClean="0"/>
+              <a:rPr lang="en-US"/>
               <a:t>Third level</a:t>
             </a:r>
           </a:p>
           <a:p>
             <a:pPr lvl="3"/>
             <a:r>
-              <a:rPr lang="en-US" smtClean="0"/>
+              <a:rPr lang="en-US"/>
               <a:t>Fourth level</a:t>
             </a:r>
           </a:p>
           <a:p>
             <a:pPr lvl="4"/>
             <a:r>
-              <a:rPr lang="en-US" smtClean="0"/>
+              <a:rPr lang="en-US"/>
               <a:t>Fifth level</a:t>
             </a:r>
-            <a:endParaRPr lang="en-US"/>
           </a:p>
         </p:txBody>
       </p:sp>
@@ -2725,7 +2745,7 @@
             <a:fld id="{1D8BD707-D9CF-40AE-B4C6-C98DA3205C09}" type="datetimeFigureOut">
               <a:rPr lang="en-US" smtClean="0"/>
               <a:pPr/>
-              <a:t>8/1/2011</a:t>
+              <a:t>5/11/2026</a:t>
             </a:fld>
             <a:endParaRPr lang="en-US"/>
           </a:p>
@@ -3080,7 +3100,7 @@
 </file>
 
 <file path=ppt/slides/slide1.xml><?xml version="1.0" encoding="utf-8"?>
-<p:sld xmlns:p="http://schemas.openxmlformats.org/presentationml/2006/main" xmlns:a="http://schemas.openxmlformats.org/drawingml/2006/main" xmlns:r="http://schemas.openxmlformats.org/officeDocument/2006/relationships">
+<p:sld xmlns:a="http://schemas.openxmlformats.org/drawingml/2006/main" xmlns:r="http://schemas.openxmlformats.org/officeDocument/2006/relationships" xmlns:p="http://schemas.openxmlformats.org/presentationml/2006/main">
   <p:cSld>
     <p:spTree>
       <p:nvGrpSpPr>
@@ -3098,12 +3118,12 @@
       </p:grpSpPr>
       <p:grpSp>
         <p:nvGrpSpPr>
-          <p:cNvPr name="Group 2" id="2"/>
+          <p:cNvPr id="2" name="Group 2"/>
           <p:cNvGrpSpPr/>
           <p:nvPr/>
         </p:nvGrpSpPr>
         <p:grpSpPr>
-          <a:xfrm rot="0">
+          <a:xfrm>
             <a:off x="0" y="0"/>
             <a:ext cx="18288000" cy="3086100"/>
             <a:chOff x="0" y="0"/>
@@ -3112,12 +3132,12 @@
         </p:grpSpPr>
         <p:sp>
           <p:nvSpPr>
-            <p:cNvPr name="Freeform 3" id="3"/>
+            <p:cNvPr id="3" name="Freeform 3"/>
             <p:cNvSpPr/>
             <p:nvPr/>
           </p:nvSpPr>
           <p:spPr>
-            <a:xfrm flipH="false" flipV="false" rot="0">
+            <a:xfrm>
               <a:off x="0" y="0"/>
               <a:ext cx="4816592" cy="812800"/>
             </a:xfrm>
@@ -3126,9 +3146,9 @@
               <a:gdLst/>
               <a:ahLst/>
               <a:cxnLst/>
-              <a:rect r="r" b="b" t="t" l="l"/>
+              <a:rect l="l" t="t" r="r" b="b"/>
               <a:pathLst>
-                <a:path h="812800" w="4816592">
+                <a:path w="4816592" h="812800">
                   <a:moveTo>
                     <a:pt x="0" y="0"/>
                   </a:moveTo>
@@ -3149,11 +3169,18 @@
               <a:srgbClr val="07223B"/>
             </a:solidFill>
           </p:spPr>
+          <p:txBody>
+            <a:bodyPr/>
+            <a:lstStyle/>
+            <a:p>
+              <a:endParaRPr lang="en-US"/>
+            </a:p>
+          </p:txBody>
         </p:sp>
         <p:sp>
           <p:nvSpPr>
-            <p:cNvPr name="TextBox 4" id="4"/>
-            <p:cNvSpPr txBox="true"/>
+            <p:cNvPr id="4" name="TextBox 4"/>
+            <p:cNvSpPr txBox="1"/>
             <p:nvPr/>
           </p:nvSpPr>
           <p:spPr>
@@ -3166,7 +3193,7 @@
             </a:prstGeom>
           </p:spPr>
           <p:txBody>
-            <a:bodyPr anchor="ctr" rtlCol="false" tIns="50800" lIns="50800" bIns="50800" rIns="50800"/>
+            <a:bodyPr lIns="50800" tIns="50800" rIns="50800" bIns="50800" rtlCol="0" anchor="ctr"/>
             <a:lstStyle/>
             <a:p>
               <a:pPr algn="ctr">
@@ -3174,18 +3201,19 @@
                   <a:spcPts val="2659"/>
                 </a:lnSpc>
               </a:pPr>
+              <a:endParaRPr/>
             </a:p>
           </p:txBody>
         </p:sp>
       </p:grpSp>
       <p:sp>
         <p:nvSpPr>
-          <p:cNvPr name="Freeform 5" id="5"/>
+          <p:cNvPr id="5" name="Freeform 5"/>
           <p:cNvSpPr/>
           <p:nvPr/>
         </p:nvSpPr>
         <p:spPr>
-          <a:xfrm flipH="false" flipV="false" rot="0">
+          <a:xfrm>
             <a:off x="7686260" y="248955"/>
             <a:ext cx="2260741" cy="2588190"/>
           </a:xfrm>
@@ -3194,9 +3222,9 @@
             <a:gdLst/>
             <a:ahLst/>
             <a:cxnLst/>
-            <a:rect r="r" b="b" t="t" l="l"/>
+            <a:rect l="l" t="t" r="r" b="b"/>
             <a:pathLst>
-              <a:path h="2588190" w="2260741">
+              <a:path w="2260741" h="2588190">
                 <a:moveTo>
                   <a:pt x="0" y="0"/>
                 </a:moveTo>
@@ -3219,19 +3247,26 @@
           <a:blipFill>
             <a:blip r:embed="rId2"/>
             <a:stretch>
-              <a:fillRect l="0" t="0" r="0" b="0"/>
+              <a:fillRect/>
             </a:stretch>
           </a:blipFill>
         </p:spPr>
-      </p:sp>
-      <p:sp>
-        <p:nvSpPr>
-          <p:cNvPr name="Freeform 6" id="6"/>
+        <p:txBody>
+          <a:bodyPr/>
+          <a:lstStyle/>
+          <a:p>
+            <a:endParaRPr lang="en-US"/>
+          </a:p>
+        </p:txBody>
+      </p:sp>
+      <p:sp>
+        <p:nvSpPr>
+          <p:cNvPr id="6" name="Freeform 6"/>
           <p:cNvSpPr/>
           <p:nvPr/>
         </p:nvSpPr>
         <p:spPr>
-          <a:xfrm flipH="false" flipV="false" rot="0">
+          <a:xfrm>
             <a:off x="15450205" y="442846"/>
             <a:ext cx="2200409" cy="2200409"/>
           </a:xfrm>
@@ -3240,9 +3275,9 @@
             <a:gdLst/>
             <a:ahLst/>
             <a:cxnLst/>
-            <a:rect r="r" b="b" t="t" l="l"/>
+            <a:rect l="l" t="t" r="r" b="b"/>
             <a:pathLst>
-              <a:path h="2200409" w="2200409">
+              <a:path w="2200409" h="2200409">
                 <a:moveTo>
                   <a:pt x="0" y="0"/>
                 </a:moveTo>
@@ -3265,19 +3300,26 @@
           <a:blipFill>
             <a:blip r:embed="rId3"/>
             <a:stretch>
-              <a:fillRect l="0" t="0" r="0" b="0"/>
+              <a:fillRect/>
             </a:stretch>
           </a:blipFill>
         </p:spPr>
-      </p:sp>
-      <p:sp>
-        <p:nvSpPr>
-          <p:cNvPr name="Freeform 7" id="7"/>
+        <p:txBody>
+          <a:bodyPr/>
+          <a:lstStyle/>
+          <a:p>
+            <a:endParaRPr lang="en-US"/>
+          </a:p>
+        </p:txBody>
+      </p:sp>
+      <p:sp>
+        <p:nvSpPr>
+          <p:cNvPr id="7" name="Freeform 7"/>
           <p:cNvSpPr/>
           <p:nvPr/>
         </p:nvSpPr>
         <p:spPr>
-          <a:xfrm flipH="false" flipV="false" rot="0">
+          <a:xfrm>
             <a:off x="1028700" y="442846"/>
             <a:ext cx="2187532" cy="2166991"/>
           </a:xfrm>
@@ -3286,9 +3328,9 @@
             <a:gdLst/>
             <a:ahLst/>
             <a:cxnLst/>
-            <a:rect r="r" b="b" t="t" l="l"/>
+            <a:rect l="l" t="t" r="r" b="b"/>
             <a:pathLst>
-              <a:path h="2166991" w="2187532">
+              <a:path w="2187532" h="2166991">
                 <a:moveTo>
                   <a:pt x="0" y="0"/>
                 </a:moveTo>
@@ -3311,19 +3353,26 @@
           <a:blipFill>
             <a:blip r:embed="rId4"/>
             <a:stretch>
-              <a:fillRect l="0" t="0" r="0" b="0"/>
+              <a:fillRect/>
             </a:stretch>
           </a:blipFill>
         </p:spPr>
-      </p:sp>
-      <p:sp>
-        <p:nvSpPr>
-          <p:cNvPr name="TextBox 8" id="8"/>
-          <p:cNvSpPr txBox="true"/>
+        <p:txBody>
+          <a:bodyPr/>
+          <a:lstStyle/>
+          <a:p>
+            <a:endParaRPr lang="en-US"/>
+          </a:p>
+        </p:txBody>
+      </p:sp>
+      <p:sp>
+        <p:nvSpPr>
+          <p:cNvPr id="8" name="TextBox 8"/>
+          <p:cNvSpPr txBox="1"/>
           <p:nvPr/>
         </p:nvSpPr>
         <p:spPr>
-          <a:xfrm rot="0">
+          <a:xfrm>
             <a:off x="1951137" y="4119245"/>
             <a:ext cx="14385727" cy="1616709"/>
           </a:xfrm>
@@ -3332,7 +3381,7 @@
           </a:prstGeom>
         </p:spPr>
         <p:txBody>
-          <a:bodyPr anchor="t" rtlCol="false" tIns="0" lIns="0" bIns="0" rIns="0">
+          <a:bodyPr lIns="0" tIns="0" rIns="0" bIns="0" rtlCol="0" anchor="t">
             <a:spAutoFit/>
           </a:bodyPr>
           <a:lstStyle/>
@@ -3346,7 +3395,7 @@
               </a:spcBef>
             </a:pPr>
             <a:r>
-              <a:rPr lang="en-US" b="true" sz="5600">
+              <a:rPr lang="en-US" sz="5600" b="1">
                 <a:solidFill>
                   <a:srgbClr val="000000"/>
                 </a:solidFill>
@@ -3368,7 +3417,7 @@
               </a:spcBef>
             </a:pPr>
             <a:r>
-              <a:rPr lang="en-US" b="true" sz="3600" i="true">
+              <a:rPr lang="en-US" sz="3600" b="1" i="1">
                 <a:solidFill>
                   <a:srgbClr val="000000"/>
                 </a:solidFill>
@@ -3384,12 +3433,12 @@
       </p:sp>
       <p:sp>
         <p:nvSpPr>
-          <p:cNvPr name="TextBox 9" id="9"/>
-          <p:cNvSpPr txBox="true"/>
+          <p:cNvPr id="9" name="TextBox 9"/>
+          <p:cNvSpPr txBox="1"/>
           <p:nvPr/>
         </p:nvSpPr>
         <p:spPr>
-          <a:xfrm rot="0">
+          <a:xfrm>
             <a:off x="5675709" y="6006174"/>
             <a:ext cx="6936581" cy="1216025"/>
           </a:xfrm>
@@ -3398,7 +3447,7 @@
           </a:prstGeom>
         </p:spPr>
         <p:txBody>
-          <a:bodyPr anchor="t" rtlCol="false" tIns="0" lIns="0" bIns="0" rIns="0">
+          <a:bodyPr lIns="0" tIns="0" rIns="0" bIns="0" rtlCol="0" anchor="t">
             <a:spAutoFit/>
           </a:bodyPr>
           <a:lstStyle/>
@@ -3412,7 +3461,7 @@
               </a:spcBef>
             </a:pPr>
             <a:r>
-              <a:rPr lang="en-US" b="true" sz="3600">
+              <a:rPr lang="en-US" sz="3600" b="1">
                 <a:solidFill>
                   <a:srgbClr val="000000"/>
                 </a:solidFill>
@@ -3434,7 +3483,7 @@
               </a:spcBef>
             </a:pPr>
             <a:r>
-              <a:rPr lang="en-US" b="true" sz="3400">
+              <a:rPr lang="en-US" sz="3400" b="1">
                 <a:solidFill>
                   <a:srgbClr val="000000"/>
                 </a:solidFill>
@@ -3450,12 +3499,12 @@
       </p:sp>
       <p:sp>
         <p:nvSpPr>
-          <p:cNvPr name="TextBox 10" id="10"/>
-          <p:cNvSpPr txBox="true"/>
+          <p:cNvPr id="10" name="TextBox 10"/>
+          <p:cNvSpPr txBox="1"/>
           <p:nvPr/>
         </p:nvSpPr>
         <p:spPr>
-          <a:xfrm rot="0">
+          <a:xfrm>
             <a:off x="2837795" y="7848309"/>
             <a:ext cx="12612410" cy="895985"/>
           </a:xfrm>
@@ -3464,7 +3513,7 @@
           </a:prstGeom>
         </p:spPr>
         <p:txBody>
-          <a:bodyPr anchor="t" rtlCol="false" tIns="0" lIns="0" bIns="0" rIns="0">
+          <a:bodyPr lIns="0" tIns="0" rIns="0" bIns="0" rtlCol="0" anchor="t">
             <a:spAutoFit/>
           </a:bodyPr>
           <a:lstStyle/>
@@ -3499,17 +3548,26 @@
                 <a:spcPct val="0"/>
               </a:spcBef>
             </a:pPr>
-          </a:p>
-        </p:txBody>
-      </p:sp>
-      <p:sp>
-        <p:nvSpPr>
-          <p:cNvPr name="TextBox 11" id="11"/>
-          <p:cNvSpPr txBox="true"/>
+            <a:endParaRPr lang="en-US" sz="2600">
+              <a:solidFill>
+                <a:srgbClr val="000000"/>
+              </a:solidFill>
+              <a:latin typeface="Muli"/>
+              <a:ea typeface="Muli"/>
+              <a:cs typeface="Muli"/>
+              <a:sym typeface="Muli"/>
+            </a:endParaRPr>
+          </a:p>
+        </p:txBody>
+      </p:sp>
+      <p:sp>
+        <p:nvSpPr>
+          <p:cNvPr id="11" name="TextBox 11"/>
+          <p:cNvSpPr txBox="1"/>
           <p:nvPr/>
         </p:nvSpPr>
         <p:spPr>
-          <a:xfrm rot="0">
+          <a:xfrm>
             <a:off x="17259300" y="9210675"/>
             <a:ext cx="152400" cy="200025"/>
           </a:xfrm>
@@ -3518,7 +3576,7 @@
           </a:prstGeom>
         </p:spPr>
         <p:txBody>
-          <a:bodyPr anchor="t" rtlCol="false" tIns="0" lIns="0" bIns="0" rIns="0" wrap="none">
+          <a:bodyPr wrap="none" lIns="0" tIns="0" rIns="0" bIns="0" rtlCol="0" anchor="t">
             <a:spAutoFit/>
           </a:bodyPr>
           <a:lstStyle/>
@@ -3548,12 +3606,12 @@
       </p:sp>
       <p:grpSp>
         <p:nvGrpSpPr>
-          <p:cNvPr name="Group 12" id="12"/>
+          <p:cNvPr id="12" name="Group 12"/>
           <p:cNvGrpSpPr/>
           <p:nvPr/>
         </p:nvGrpSpPr>
         <p:grpSpPr>
-          <a:xfrm rot="0">
+          <a:xfrm>
             <a:off x="0" y="9775281"/>
             <a:ext cx="18288000" cy="725646"/>
             <a:chOff x="0" y="0"/>
@@ -3562,12 +3620,12 @@
         </p:grpSpPr>
         <p:sp>
           <p:nvSpPr>
-            <p:cNvPr name="Freeform 13" id="13"/>
+            <p:cNvPr id="13" name="Freeform 13"/>
             <p:cNvSpPr/>
             <p:nvPr/>
           </p:nvSpPr>
           <p:spPr>
-            <a:xfrm flipH="false" flipV="false" rot="0">
+            <a:xfrm>
               <a:off x="0" y="0"/>
               <a:ext cx="4816592" cy="191117"/>
             </a:xfrm>
@@ -3576,9 +3634,9 @@
               <a:gdLst/>
               <a:ahLst/>
               <a:cxnLst/>
-              <a:rect r="r" b="b" t="t" l="l"/>
+              <a:rect l="l" t="t" r="r" b="b"/>
               <a:pathLst>
-                <a:path h="191117" w="4816592">
+                <a:path w="4816592" h="191117">
                   <a:moveTo>
                     <a:pt x="0" y="0"/>
                   </a:moveTo>
@@ -3599,11 +3657,18 @@
               <a:srgbClr val="07223B"/>
             </a:solidFill>
           </p:spPr>
+          <p:txBody>
+            <a:bodyPr/>
+            <a:lstStyle/>
+            <a:p>
+              <a:endParaRPr lang="en-US"/>
+            </a:p>
+          </p:txBody>
         </p:sp>
         <p:sp>
           <p:nvSpPr>
-            <p:cNvPr name="TextBox 14" id="14"/>
-            <p:cNvSpPr txBox="true"/>
+            <p:cNvPr id="14" name="TextBox 14"/>
+            <p:cNvSpPr txBox="1"/>
             <p:nvPr/>
           </p:nvSpPr>
           <p:spPr>
@@ -3616,7 +3681,7 @@
             </a:prstGeom>
           </p:spPr>
           <p:txBody>
-            <a:bodyPr anchor="ctr" rtlCol="false" tIns="50800" lIns="50800" bIns="50800" rIns="50800"/>
+            <a:bodyPr lIns="50800" tIns="50800" rIns="50800" bIns="50800" rtlCol="0" anchor="ctr"/>
             <a:lstStyle/>
             <a:p>
               <a:pPr algn="ctr">
@@ -3624,6 +3689,7 @@
                   <a:spcPts val="2659"/>
                 </a:lnSpc>
               </a:pPr>
+              <a:endParaRPr/>
             </a:p>
           </p:txBody>
         </p:sp>
@@ -3637,7 +3703,7 @@
 </file>
 
 <file path=ppt/slides/slide10.xml><?xml version="1.0" encoding="utf-8"?>
-<p:sld xmlns:p="http://schemas.openxmlformats.org/presentationml/2006/main" xmlns:a="http://schemas.openxmlformats.org/drawingml/2006/main">
+<p:sld xmlns:a="http://schemas.openxmlformats.org/drawingml/2006/main" xmlns:r="http://schemas.openxmlformats.org/officeDocument/2006/relationships" xmlns:p="http://schemas.openxmlformats.org/presentationml/2006/main">
   <p:cSld>
     <p:spTree>
       <p:nvGrpSpPr>
@@ -3655,12 +3721,12 @@
       </p:grpSpPr>
       <p:sp>
         <p:nvSpPr>
-          <p:cNvPr name="TextBox 2" id="2"/>
-          <p:cNvSpPr txBox="true"/>
+          <p:cNvPr id="2" name="TextBox 2"/>
+          <p:cNvSpPr txBox="1"/>
           <p:nvPr/>
         </p:nvSpPr>
         <p:spPr>
-          <a:xfrm rot="0">
+          <a:xfrm>
             <a:off x="6070771" y="4781098"/>
             <a:ext cx="6146458" cy="877203"/>
           </a:xfrm>
@@ -3669,7 +3735,7 @@
           </a:prstGeom>
         </p:spPr>
         <p:txBody>
-          <a:bodyPr anchor="t" rtlCol="false" tIns="0" lIns="0" bIns="0" rIns="0">
+          <a:bodyPr lIns="0" tIns="0" rIns="0" bIns="0" rtlCol="0" anchor="t">
             <a:spAutoFit/>
           </a:bodyPr>
           <a:lstStyle/>
@@ -3696,12 +3762,12 @@
       </p:sp>
       <p:sp>
         <p:nvSpPr>
-          <p:cNvPr name="TextBox 3" id="3"/>
-          <p:cNvSpPr txBox="true"/>
+          <p:cNvPr id="3" name="TextBox 3"/>
+          <p:cNvSpPr txBox="1"/>
           <p:nvPr/>
         </p:nvSpPr>
         <p:spPr>
-          <a:xfrm rot="0">
+          <a:xfrm>
             <a:off x="17259300" y="9210675"/>
             <a:ext cx="152400" cy="200025"/>
           </a:xfrm>
@@ -3710,7 +3776,7 @@
           </a:prstGeom>
         </p:spPr>
         <p:txBody>
-          <a:bodyPr anchor="t" rtlCol="false" tIns="0" lIns="0" bIns="0" rIns="0" wrap="none">
+          <a:bodyPr wrap="none" lIns="0" tIns="0" rIns="0" bIns="0" rtlCol="0" anchor="t">
             <a:spAutoFit/>
           </a:bodyPr>
           <a:lstStyle/>
@@ -3740,12 +3806,12 @@
       </p:sp>
       <p:grpSp>
         <p:nvGrpSpPr>
-          <p:cNvPr name="Group 4" id="4"/>
+          <p:cNvPr id="4" name="Group 4"/>
           <p:cNvGrpSpPr/>
           <p:nvPr/>
         </p:nvGrpSpPr>
         <p:grpSpPr>
-          <a:xfrm rot="0">
+          <a:xfrm>
             <a:off x="0" y="9775281"/>
             <a:ext cx="18288000" cy="725646"/>
             <a:chOff x="0" y="0"/>
@@ -3754,12 +3820,12 @@
         </p:grpSpPr>
         <p:sp>
           <p:nvSpPr>
-            <p:cNvPr name="Freeform 5" id="5"/>
+            <p:cNvPr id="5" name="Freeform 5"/>
             <p:cNvSpPr/>
             <p:nvPr/>
           </p:nvSpPr>
           <p:spPr>
-            <a:xfrm flipH="false" flipV="false" rot="0">
+            <a:xfrm>
               <a:off x="0" y="0"/>
               <a:ext cx="4816592" cy="191117"/>
             </a:xfrm>
@@ -3768,9 +3834,9 @@
               <a:gdLst/>
               <a:ahLst/>
               <a:cxnLst/>
-              <a:rect r="r" b="b" t="t" l="l"/>
+              <a:rect l="l" t="t" r="r" b="b"/>
               <a:pathLst>
-                <a:path h="191117" w="4816592">
+                <a:path w="4816592" h="191117">
                   <a:moveTo>
                     <a:pt x="0" y="0"/>
                   </a:moveTo>
@@ -3791,11 +3857,18 @@
               <a:srgbClr val="07223B"/>
             </a:solidFill>
           </p:spPr>
+          <p:txBody>
+            <a:bodyPr/>
+            <a:lstStyle/>
+            <a:p>
+              <a:endParaRPr lang="en-US"/>
+            </a:p>
+          </p:txBody>
         </p:sp>
         <p:sp>
           <p:nvSpPr>
-            <p:cNvPr name="TextBox 6" id="6"/>
-            <p:cNvSpPr txBox="true"/>
+            <p:cNvPr id="6" name="TextBox 6"/>
+            <p:cNvSpPr txBox="1"/>
             <p:nvPr/>
           </p:nvSpPr>
           <p:spPr>
@@ -3808,7 +3881,7 @@
             </a:prstGeom>
           </p:spPr>
           <p:txBody>
-            <a:bodyPr anchor="ctr" rtlCol="false" tIns="50800" lIns="50800" bIns="50800" rIns="50800"/>
+            <a:bodyPr lIns="50800" tIns="50800" rIns="50800" bIns="50800" rtlCol="0" anchor="ctr"/>
             <a:lstStyle/>
             <a:p>
               <a:pPr algn="ctr">
@@ -3816,6 +3889,7 @@
                   <a:spcPts val="2659"/>
                 </a:lnSpc>
               </a:pPr>
+              <a:endParaRPr/>
             </a:p>
           </p:txBody>
         </p:sp>
@@ -3829,7 +3903,7 @@
 </file>
 
 <file path=ppt/slides/slide11.xml><?xml version="1.0" encoding="utf-8"?>
-<p:sld xmlns:p="http://schemas.openxmlformats.org/presentationml/2006/main" xmlns:a="http://schemas.openxmlformats.org/drawingml/2006/main">
+<p:sld xmlns:a="http://schemas.openxmlformats.org/drawingml/2006/main" xmlns:r="http://schemas.openxmlformats.org/officeDocument/2006/relationships" xmlns:p="http://schemas.openxmlformats.org/presentationml/2006/main">
   <p:cSld>
     <p:spTree>
       <p:nvGrpSpPr>
@@ -3847,12 +3921,12 @@
       </p:grpSpPr>
       <p:sp>
         <p:nvSpPr>
-          <p:cNvPr name="TextBox 2" id="2"/>
-          <p:cNvSpPr txBox="true"/>
+          <p:cNvPr id="2" name="TextBox 2"/>
+          <p:cNvSpPr txBox="1"/>
           <p:nvPr/>
         </p:nvSpPr>
         <p:spPr>
-          <a:xfrm rot="0">
+          <a:xfrm>
             <a:off x="6414464" y="4781098"/>
             <a:ext cx="5459073" cy="877203"/>
           </a:xfrm>
@@ -3861,7 +3935,7 @@
           </a:prstGeom>
         </p:spPr>
         <p:txBody>
-          <a:bodyPr anchor="t" rtlCol="false" tIns="0" lIns="0" bIns="0" rIns="0">
+          <a:bodyPr lIns="0" tIns="0" rIns="0" bIns="0" rtlCol="0" anchor="t">
             <a:spAutoFit/>
           </a:bodyPr>
           <a:lstStyle/>
@@ -3888,12 +3962,12 @@
       </p:sp>
       <p:sp>
         <p:nvSpPr>
-          <p:cNvPr name="TextBox 3" id="3"/>
-          <p:cNvSpPr txBox="true"/>
+          <p:cNvPr id="3" name="TextBox 3"/>
+          <p:cNvSpPr txBox="1"/>
           <p:nvPr/>
         </p:nvSpPr>
         <p:spPr>
-          <a:xfrm rot="0">
+          <a:xfrm>
             <a:off x="17259300" y="9210675"/>
             <a:ext cx="152400" cy="200025"/>
           </a:xfrm>
@@ -3902,7 +3976,7 @@
           </a:prstGeom>
         </p:spPr>
         <p:txBody>
-          <a:bodyPr anchor="t" rtlCol="false" tIns="0" lIns="0" bIns="0" rIns="0" wrap="none">
+          <a:bodyPr wrap="none" lIns="0" tIns="0" rIns="0" bIns="0" rtlCol="0" anchor="t">
             <a:spAutoFit/>
           </a:bodyPr>
           <a:lstStyle/>
@@ -3932,12 +4006,12 @@
       </p:sp>
       <p:grpSp>
         <p:nvGrpSpPr>
-          <p:cNvPr name="Group 4" id="4"/>
+          <p:cNvPr id="4" name="Group 4"/>
           <p:cNvGrpSpPr/>
           <p:nvPr/>
         </p:nvGrpSpPr>
         <p:grpSpPr>
-          <a:xfrm rot="0">
+          <a:xfrm>
             <a:off x="0" y="9775281"/>
             <a:ext cx="18288000" cy="725646"/>
             <a:chOff x="0" y="0"/>
@@ -3946,12 +4020,12 @@
         </p:grpSpPr>
         <p:sp>
           <p:nvSpPr>
-            <p:cNvPr name="Freeform 5" id="5"/>
+            <p:cNvPr id="5" name="Freeform 5"/>
             <p:cNvSpPr/>
             <p:nvPr/>
           </p:nvSpPr>
           <p:spPr>
-            <a:xfrm flipH="false" flipV="false" rot="0">
+            <a:xfrm>
               <a:off x="0" y="0"/>
               <a:ext cx="4816592" cy="191117"/>
             </a:xfrm>
@@ -3960,9 +4034,9 @@
               <a:gdLst/>
               <a:ahLst/>
               <a:cxnLst/>
-              <a:rect r="r" b="b" t="t" l="l"/>
+              <a:rect l="l" t="t" r="r" b="b"/>
               <a:pathLst>
-                <a:path h="191117" w="4816592">
+                <a:path w="4816592" h="191117">
                   <a:moveTo>
                     <a:pt x="0" y="0"/>
                   </a:moveTo>
@@ -3983,11 +4057,18 @@
               <a:srgbClr val="07223B"/>
             </a:solidFill>
           </p:spPr>
+          <p:txBody>
+            <a:bodyPr/>
+            <a:lstStyle/>
+            <a:p>
+              <a:endParaRPr lang="en-US"/>
+            </a:p>
+          </p:txBody>
         </p:sp>
         <p:sp>
           <p:nvSpPr>
-            <p:cNvPr name="TextBox 6" id="6"/>
-            <p:cNvSpPr txBox="true"/>
+            <p:cNvPr id="6" name="TextBox 6"/>
+            <p:cNvSpPr txBox="1"/>
             <p:nvPr/>
           </p:nvSpPr>
           <p:spPr>
@@ -4000,7 +4081,7 @@
             </a:prstGeom>
           </p:spPr>
           <p:txBody>
-            <a:bodyPr anchor="ctr" rtlCol="false" tIns="50800" lIns="50800" bIns="50800" rIns="50800"/>
+            <a:bodyPr lIns="50800" tIns="50800" rIns="50800" bIns="50800" rtlCol="0" anchor="ctr"/>
             <a:lstStyle/>
             <a:p>
               <a:pPr algn="ctr">
@@ -4008,6 +4089,7 @@
                   <a:spcPts val="2659"/>
                 </a:lnSpc>
               </a:pPr>
+              <a:endParaRPr/>
             </a:p>
           </p:txBody>
         </p:sp>
@@ -4021,7 +4103,7 @@
 </file>
 
 <file path=ppt/slides/slide12.xml><?xml version="1.0" encoding="utf-8"?>
-<p:sld xmlns:p="http://schemas.openxmlformats.org/presentationml/2006/main" xmlns:a="http://schemas.openxmlformats.org/drawingml/2006/main">
+<p:sld xmlns:a="http://schemas.openxmlformats.org/drawingml/2006/main" xmlns:r="http://schemas.openxmlformats.org/officeDocument/2006/relationships" xmlns:p="http://schemas.openxmlformats.org/presentationml/2006/main">
   <p:cSld>
     <p:spTree>
       <p:nvGrpSpPr>
@@ -4039,12 +4121,12 @@
       </p:grpSpPr>
       <p:sp>
         <p:nvSpPr>
-          <p:cNvPr name="TextBox 2" id="2"/>
-          <p:cNvSpPr txBox="true"/>
+          <p:cNvPr id="2" name="TextBox 2"/>
+          <p:cNvSpPr txBox="1"/>
           <p:nvPr/>
         </p:nvSpPr>
         <p:spPr>
-          <a:xfrm rot="0">
+          <a:xfrm>
             <a:off x="17259300" y="9210675"/>
             <a:ext cx="152400" cy="200025"/>
           </a:xfrm>
@@ -4053,7 +4135,7 @@
           </a:prstGeom>
         </p:spPr>
         <p:txBody>
-          <a:bodyPr anchor="t" rtlCol="false" tIns="0" lIns="0" bIns="0" rIns="0" wrap="none">
+          <a:bodyPr wrap="none" lIns="0" tIns="0" rIns="0" bIns="0" rtlCol="0" anchor="t">
             <a:spAutoFit/>
           </a:bodyPr>
           <a:lstStyle/>
@@ -4090,7 +4172,7 @@
 </file>
 
 <file path=ppt/slides/slide2.xml><?xml version="1.0" encoding="utf-8"?>
-<p:sld xmlns:p="http://schemas.openxmlformats.org/presentationml/2006/main" xmlns:a="http://schemas.openxmlformats.org/drawingml/2006/main">
+<p:sld xmlns:a="http://schemas.openxmlformats.org/drawingml/2006/main" xmlns:r="http://schemas.openxmlformats.org/officeDocument/2006/relationships" xmlns:p="http://schemas.openxmlformats.org/presentationml/2006/main">
   <p:cSld>
     <p:spTree>
       <p:nvGrpSpPr>
@@ -4108,12 +4190,12 @@
       </p:grpSpPr>
       <p:sp>
         <p:nvSpPr>
-          <p:cNvPr name="TextBox 2" id="2"/>
-          <p:cNvSpPr txBox="true"/>
+          <p:cNvPr id="2" name="TextBox 2"/>
+          <p:cNvSpPr txBox="1"/>
           <p:nvPr/>
         </p:nvSpPr>
         <p:spPr>
-          <a:xfrm rot="0">
+          <a:xfrm>
             <a:off x="4346749" y="1607459"/>
             <a:ext cx="9594503" cy="1566544"/>
           </a:xfrm>
@@ -4122,7 +4204,7 @@
           </a:prstGeom>
         </p:spPr>
         <p:txBody>
-          <a:bodyPr anchor="t" rtlCol="false" tIns="0" lIns="0" bIns="0" rIns="0">
+          <a:bodyPr lIns="0" tIns="0" rIns="0" bIns="0" rtlCol="0" anchor="t">
             <a:spAutoFit/>
           </a:bodyPr>
           <a:lstStyle/>
@@ -4149,12 +4231,12 @@
       </p:sp>
       <p:sp>
         <p:nvSpPr>
-          <p:cNvPr name="TextBox 3" id="3"/>
-          <p:cNvSpPr txBox="true"/>
+          <p:cNvPr id="3" name="TextBox 3"/>
+          <p:cNvSpPr txBox="1"/>
           <p:nvPr/>
         </p:nvSpPr>
         <p:spPr>
-          <a:xfrm rot="0">
+          <a:xfrm>
             <a:off x="1028700" y="3535953"/>
             <a:ext cx="16230600" cy="745540"/>
           </a:xfrm>
@@ -4163,7 +4245,7 @@
           </a:prstGeom>
         </p:spPr>
         <p:txBody>
-          <a:bodyPr anchor="t" rtlCol="false" tIns="0" lIns="0" bIns="0" rIns="0">
+          <a:bodyPr lIns="0" tIns="0" rIns="0" bIns="0" rtlCol="0" anchor="t">
             <a:spAutoFit/>
           </a:bodyPr>
           <a:lstStyle/>
@@ -4174,7 +4256,7 @@
               </a:lnSpc>
             </a:pPr>
             <a:r>
-              <a:rPr lang="en-US" sz="4399" b="true">
+              <a:rPr lang="en-US" sz="4399" b="1">
                 <a:solidFill>
                   <a:srgbClr val="000000"/>
                 </a:solidFill>
@@ -4190,12 +4272,12 @@
       </p:sp>
       <p:sp>
         <p:nvSpPr>
-          <p:cNvPr name="TextBox 4" id="4"/>
-          <p:cNvSpPr txBox="true"/>
+          <p:cNvPr id="4" name="TextBox 4"/>
+          <p:cNvSpPr txBox="1"/>
           <p:nvPr/>
         </p:nvSpPr>
         <p:spPr>
-          <a:xfrm rot="0">
+          <a:xfrm>
             <a:off x="1028700" y="4644687"/>
             <a:ext cx="16230600" cy="745539"/>
           </a:xfrm>
@@ -4204,7 +4286,7 @@
           </a:prstGeom>
         </p:spPr>
         <p:txBody>
-          <a:bodyPr anchor="t" rtlCol="false" tIns="0" lIns="0" bIns="0" rIns="0">
+          <a:bodyPr lIns="0" tIns="0" rIns="0" bIns="0" rtlCol="0" anchor="t">
             <a:spAutoFit/>
           </a:bodyPr>
           <a:lstStyle/>
@@ -4215,7 +4297,7 @@
               </a:lnSpc>
             </a:pPr>
             <a:r>
-              <a:rPr lang="en-US" sz="4400" b="true">
+              <a:rPr lang="en-US" sz="4400" b="1">
                 <a:solidFill>
                   <a:srgbClr val="000000"/>
                 </a:solidFill>
@@ -4231,12 +4313,12 @@
       </p:sp>
       <p:sp>
         <p:nvSpPr>
-          <p:cNvPr name="TextBox 5" id="5"/>
-          <p:cNvSpPr txBox="true"/>
+          <p:cNvPr id="5" name="TextBox 5"/>
+          <p:cNvSpPr txBox="1"/>
           <p:nvPr/>
         </p:nvSpPr>
         <p:spPr>
-          <a:xfrm rot="0">
+          <a:xfrm>
             <a:off x="1028700" y="5753420"/>
             <a:ext cx="16230600" cy="745539"/>
           </a:xfrm>
@@ -4245,7 +4327,7 @@
           </a:prstGeom>
         </p:spPr>
         <p:txBody>
-          <a:bodyPr anchor="t" rtlCol="false" tIns="0" lIns="0" bIns="0" rIns="0">
+          <a:bodyPr lIns="0" tIns="0" rIns="0" bIns="0" rtlCol="0" anchor="t">
             <a:spAutoFit/>
           </a:bodyPr>
           <a:lstStyle/>
@@ -4256,7 +4338,7 @@
               </a:lnSpc>
             </a:pPr>
             <a:r>
-              <a:rPr lang="en-US" sz="4400" b="true">
+              <a:rPr lang="en-US" sz="4400" b="1">
                 <a:solidFill>
                   <a:srgbClr val="000000"/>
                 </a:solidFill>
@@ -4272,12 +4354,12 @@
       </p:sp>
       <p:grpSp>
         <p:nvGrpSpPr>
-          <p:cNvPr name="Group 6" id="6"/>
+          <p:cNvPr id="6" name="Group 6"/>
           <p:cNvGrpSpPr/>
           <p:nvPr/>
         </p:nvGrpSpPr>
         <p:grpSpPr>
-          <a:xfrm rot="0">
+          <a:xfrm>
             <a:off x="0" y="9775281"/>
             <a:ext cx="18288000" cy="725646"/>
             <a:chOff x="0" y="0"/>
@@ -4286,12 +4368,12 @@
         </p:grpSpPr>
         <p:sp>
           <p:nvSpPr>
-            <p:cNvPr name="Freeform 7" id="7"/>
+            <p:cNvPr id="7" name="Freeform 7"/>
             <p:cNvSpPr/>
             <p:nvPr/>
           </p:nvSpPr>
           <p:spPr>
-            <a:xfrm flipH="false" flipV="false" rot="0">
+            <a:xfrm>
               <a:off x="0" y="0"/>
               <a:ext cx="4816592" cy="191117"/>
             </a:xfrm>
@@ -4300,9 +4382,9 @@
               <a:gdLst/>
               <a:ahLst/>
               <a:cxnLst/>
-              <a:rect r="r" b="b" t="t" l="l"/>
+              <a:rect l="l" t="t" r="r" b="b"/>
               <a:pathLst>
-                <a:path h="191117" w="4816592">
+                <a:path w="4816592" h="191117">
                   <a:moveTo>
                     <a:pt x="0" y="0"/>
                   </a:moveTo>
@@ -4323,11 +4405,18 @@
               <a:srgbClr val="07223B"/>
             </a:solidFill>
           </p:spPr>
+          <p:txBody>
+            <a:bodyPr/>
+            <a:lstStyle/>
+            <a:p>
+              <a:endParaRPr lang="en-US"/>
+            </a:p>
+          </p:txBody>
         </p:sp>
         <p:sp>
           <p:nvSpPr>
-            <p:cNvPr name="TextBox 8" id="8"/>
-            <p:cNvSpPr txBox="true"/>
+            <p:cNvPr id="8" name="TextBox 8"/>
+            <p:cNvSpPr txBox="1"/>
             <p:nvPr/>
           </p:nvSpPr>
           <p:spPr>
@@ -4340,7 +4429,7 @@
             </a:prstGeom>
           </p:spPr>
           <p:txBody>
-            <a:bodyPr anchor="ctr" rtlCol="false" tIns="50800" lIns="50800" bIns="50800" rIns="50800"/>
+            <a:bodyPr lIns="50800" tIns="50800" rIns="50800" bIns="50800" rtlCol="0" anchor="ctr"/>
             <a:lstStyle/>
             <a:p>
               <a:pPr algn="ctr">
@@ -4348,18 +4437,19 @@
                   <a:spcPts val="2659"/>
                 </a:lnSpc>
               </a:pPr>
+              <a:endParaRPr/>
             </a:p>
           </p:txBody>
         </p:sp>
       </p:grpSp>
       <p:sp>
         <p:nvSpPr>
-          <p:cNvPr name="TextBox 9" id="9"/>
-          <p:cNvSpPr txBox="true"/>
+          <p:cNvPr id="9" name="TextBox 9"/>
+          <p:cNvSpPr txBox="1"/>
           <p:nvPr/>
         </p:nvSpPr>
         <p:spPr>
-          <a:xfrm rot="0">
+          <a:xfrm>
             <a:off x="17259300" y="9210675"/>
             <a:ext cx="152400" cy="200025"/>
           </a:xfrm>
@@ -4368,7 +4458,7 @@
           </a:prstGeom>
         </p:spPr>
         <p:txBody>
-          <a:bodyPr anchor="t" rtlCol="false" tIns="0" lIns="0" bIns="0" rIns="0" wrap="none">
+          <a:bodyPr wrap="none" lIns="0" tIns="0" rIns="0" bIns="0" rtlCol="0" anchor="t">
             <a:spAutoFit/>
           </a:bodyPr>
           <a:lstStyle/>
@@ -4405,7 +4495,7 @@
 </file>
 
 <file path=ppt/slides/slide3.xml><?xml version="1.0" encoding="utf-8"?>
-<p:sld xmlns:p="http://schemas.openxmlformats.org/presentationml/2006/main" xmlns:a="http://schemas.openxmlformats.org/drawingml/2006/main" xmlns:r="http://schemas.openxmlformats.org/officeDocument/2006/relationships">
+<p:sld xmlns:a="http://schemas.openxmlformats.org/drawingml/2006/main" xmlns:r="http://schemas.openxmlformats.org/officeDocument/2006/relationships" xmlns:p="http://schemas.openxmlformats.org/presentationml/2006/main">
   <p:cSld>
     <p:spTree>
       <p:nvGrpSpPr>
@@ -4423,12 +4513,12 @@
       </p:grpSpPr>
       <p:grpSp>
         <p:nvGrpSpPr>
-          <p:cNvPr name="Group 2" id="2"/>
+          <p:cNvPr id="2" name="Group 2"/>
           <p:cNvGrpSpPr/>
           <p:nvPr/>
         </p:nvGrpSpPr>
         <p:grpSpPr>
-          <a:xfrm rot="0">
+          <a:xfrm>
             <a:off x="0" y="9775281"/>
             <a:ext cx="18288000" cy="725646"/>
             <a:chOff x="0" y="0"/>
@@ -4437,12 +4527,12 @@
         </p:grpSpPr>
         <p:sp>
           <p:nvSpPr>
-            <p:cNvPr name="Freeform 3" id="3"/>
+            <p:cNvPr id="3" name="Freeform 3"/>
             <p:cNvSpPr/>
             <p:nvPr/>
           </p:nvSpPr>
           <p:spPr>
-            <a:xfrm flipH="false" flipV="false" rot="0">
+            <a:xfrm>
               <a:off x="0" y="0"/>
               <a:ext cx="4816592" cy="191117"/>
             </a:xfrm>
@@ -4451,9 +4541,9 @@
               <a:gdLst/>
               <a:ahLst/>
               <a:cxnLst/>
-              <a:rect r="r" b="b" t="t" l="l"/>
+              <a:rect l="l" t="t" r="r" b="b"/>
               <a:pathLst>
-                <a:path h="191117" w="4816592">
+                <a:path w="4816592" h="191117">
                   <a:moveTo>
                     <a:pt x="0" y="0"/>
                   </a:moveTo>
@@ -4474,11 +4564,18 @@
               <a:srgbClr val="07223B"/>
             </a:solidFill>
           </p:spPr>
+          <p:txBody>
+            <a:bodyPr/>
+            <a:lstStyle/>
+            <a:p>
+              <a:endParaRPr lang="en-US"/>
+            </a:p>
+          </p:txBody>
         </p:sp>
         <p:sp>
           <p:nvSpPr>
-            <p:cNvPr name="TextBox 4" id="4"/>
-            <p:cNvSpPr txBox="true"/>
+            <p:cNvPr id="4" name="TextBox 4"/>
+            <p:cNvSpPr txBox="1"/>
             <p:nvPr/>
           </p:nvSpPr>
           <p:spPr>
@@ -4491,7 +4588,7 @@
             </a:prstGeom>
           </p:spPr>
           <p:txBody>
-            <a:bodyPr anchor="ctr" rtlCol="false" tIns="50800" lIns="50800" bIns="50800" rIns="50800"/>
+            <a:bodyPr lIns="50800" tIns="50800" rIns="50800" bIns="50800" rtlCol="0" anchor="ctr"/>
             <a:lstStyle/>
             <a:p>
               <a:pPr algn="ctr">
@@ -4499,18 +4596,19 @@
                   <a:spcPts val="2659"/>
                 </a:lnSpc>
               </a:pPr>
+              <a:endParaRPr/>
             </a:p>
           </p:txBody>
         </p:sp>
       </p:grpSp>
       <p:grpSp>
         <p:nvGrpSpPr>
-          <p:cNvPr name="Group 5" id="5"/>
+          <p:cNvPr id="5" name="Group 5"/>
           <p:cNvGrpSpPr/>
           <p:nvPr/>
         </p:nvGrpSpPr>
         <p:grpSpPr>
-          <a:xfrm rot="0">
+          <a:xfrm>
             <a:off x="-692004" y="1613850"/>
             <a:ext cx="19672009" cy="10049024"/>
             <a:chOff x="0" y="0"/>
@@ -4519,12 +4617,12 @@
         </p:grpSpPr>
         <p:sp>
           <p:nvSpPr>
-            <p:cNvPr name="Freeform 6" id="6"/>
+            <p:cNvPr id="6" name="Freeform 6"/>
             <p:cNvSpPr/>
             <p:nvPr/>
           </p:nvSpPr>
           <p:spPr>
-            <a:xfrm flipH="false" flipV="false" rot="0">
+            <a:xfrm>
               <a:off x="0" y="0"/>
               <a:ext cx="5181105" cy="2646657"/>
             </a:xfrm>
@@ -4533,9 +4631,9 @@
               <a:gdLst/>
               <a:ahLst/>
               <a:cxnLst/>
-              <a:rect r="r" b="b" t="t" l="l"/>
+              <a:rect l="l" t="t" r="r" b="b"/>
               <a:pathLst>
-                <a:path h="2646657" w="5181105">
+                <a:path w="5181105" h="2646657">
                   <a:moveTo>
                     <a:pt x="0" y="0"/>
                   </a:moveTo>
@@ -4560,11 +4658,18 @@
               <a:miter/>
             </a:ln>
           </p:spPr>
+          <p:txBody>
+            <a:bodyPr/>
+            <a:lstStyle/>
+            <a:p>
+              <a:endParaRPr lang="en-US"/>
+            </a:p>
+          </p:txBody>
         </p:sp>
         <p:sp>
           <p:nvSpPr>
-            <p:cNvPr name="TextBox 7" id="7"/>
-            <p:cNvSpPr txBox="true"/>
+            <p:cNvPr id="7" name="TextBox 7"/>
+            <p:cNvSpPr txBox="1"/>
             <p:nvPr/>
           </p:nvSpPr>
           <p:spPr>
@@ -4577,7 +4682,7 @@
             </a:prstGeom>
           </p:spPr>
           <p:txBody>
-            <a:bodyPr anchor="ctr" rtlCol="false" tIns="50800" lIns="50800" bIns="50800" rIns="50800"/>
+            <a:bodyPr lIns="50800" tIns="50800" rIns="50800" bIns="50800" rtlCol="0" anchor="ctr"/>
             <a:lstStyle/>
             <a:p>
               <a:pPr algn="ctr">
@@ -4585,18 +4690,19 @@
                   <a:spcPts val="2659"/>
                 </a:lnSpc>
               </a:pPr>
+              <a:endParaRPr/>
             </a:p>
           </p:txBody>
         </p:sp>
       </p:grpSp>
       <p:grpSp>
         <p:nvGrpSpPr>
-          <p:cNvPr name="Group 8" id="8"/>
+          <p:cNvPr id="8" name="Group 8"/>
           <p:cNvGrpSpPr/>
           <p:nvPr/>
         </p:nvGrpSpPr>
         <p:grpSpPr>
-          <a:xfrm rot="0">
+          <a:xfrm>
             <a:off x="1028700" y="759724"/>
             <a:ext cx="12503813" cy="1686167"/>
             <a:chOff x="0" y="0"/>
@@ -4605,12 +4711,12 @@
         </p:grpSpPr>
         <p:sp>
           <p:nvSpPr>
-            <p:cNvPr name="Freeform 9" id="9"/>
+            <p:cNvPr id="9" name="Freeform 9"/>
             <p:cNvSpPr/>
             <p:nvPr/>
           </p:nvSpPr>
           <p:spPr>
-            <a:xfrm flipH="false" flipV="false" rot="0">
+            <a:xfrm>
               <a:off x="0" y="0"/>
               <a:ext cx="3293185" cy="444093"/>
             </a:xfrm>
@@ -4619,9 +4725,9 @@
               <a:gdLst/>
               <a:ahLst/>
               <a:cxnLst/>
-              <a:rect r="r" b="b" t="t" l="l"/>
+              <a:rect l="l" t="t" r="r" b="b"/>
               <a:pathLst>
-                <a:path h="444093" w="3293185">
+                <a:path w="3293185" h="444093">
                   <a:moveTo>
                     <a:pt x="0" y="0"/>
                   </a:moveTo>
@@ -4647,11 +4753,18 @@
               <a:miter/>
             </a:ln>
           </p:spPr>
+          <p:txBody>
+            <a:bodyPr/>
+            <a:lstStyle/>
+            <a:p>
+              <a:endParaRPr lang="en-US"/>
+            </a:p>
+          </p:txBody>
         </p:sp>
         <p:sp>
           <p:nvSpPr>
-            <p:cNvPr name="TextBox 10" id="10"/>
-            <p:cNvSpPr txBox="true"/>
+            <p:cNvPr id="10" name="TextBox 10"/>
+            <p:cNvSpPr txBox="1"/>
             <p:nvPr/>
           </p:nvSpPr>
           <p:spPr>
@@ -4664,7 +4777,7 @@
             </a:prstGeom>
           </p:spPr>
           <p:txBody>
-            <a:bodyPr anchor="ctr" rtlCol="false" tIns="50800" lIns="50800" bIns="50800" rIns="50800"/>
+            <a:bodyPr lIns="50800" tIns="50800" rIns="50800" bIns="50800" rtlCol="0" anchor="ctr"/>
             <a:lstStyle/>
             <a:p>
               <a:pPr algn="ctr">
@@ -4672,18 +4785,19 @@
                   <a:spcPts val="2659"/>
                 </a:lnSpc>
               </a:pPr>
+              <a:endParaRPr/>
             </a:p>
           </p:txBody>
         </p:sp>
       </p:grpSp>
       <p:sp>
         <p:nvSpPr>
-          <p:cNvPr name="TextBox 11" id="11"/>
-          <p:cNvSpPr txBox="true"/>
+          <p:cNvPr id="11" name="TextBox 11"/>
+          <p:cNvSpPr txBox="1"/>
           <p:nvPr/>
         </p:nvSpPr>
         <p:spPr>
-          <a:xfrm rot="0">
+          <a:xfrm>
             <a:off x="1273808" y="3422650"/>
             <a:ext cx="16377323" cy="7781150"/>
           </a:xfrm>
@@ -4692,7 +4806,7 @@
           </a:prstGeom>
         </p:spPr>
         <p:txBody>
-          <a:bodyPr anchor="t" rtlCol="false" tIns="0" lIns="0" bIns="0" rIns="0">
+          <a:bodyPr lIns="0" tIns="0" rIns="0" bIns="0" rtlCol="0" anchor="t">
             <a:spAutoFit/>
           </a:bodyPr>
           <a:lstStyle/>
@@ -4712,55 +4826,7 @@
                 <a:cs typeface="Arial"/>
                 <a:sym typeface="Arial"/>
               </a:rPr>
-              <a:t>– Intr</a:t>
-            </a:r>
-            <a:r>
-              <a:rPr lang="en-US" sz="4000">
-                <a:solidFill>
-                  <a:srgbClr val="000000"/>
-                </a:solidFill>
-                <a:latin typeface="Arial"/>
-                <a:ea typeface="Arial"/>
-                <a:cs typeface="Arial"/>
-                <a:sym typeface="Arial"/>
-              </a:rPr>
-              <a:t>od</a:t>
-            </a:r>
-            <a:r>
-              <a:rPr lang="en-US" sz="4000">
-                <a:solidFill>
-                  <a:srgbClr val="000000"/>
-                </a:solidFill>
-                <a:latin typeface="Arial"/>
-                <a:ea typeface="Arial"/>
-                <a:cs typeface="Arial"/>
-                <a:sym typeface="Arial"/>
-              </a:rPr>
-              <a:t>uc</a:t>
-            </a:r>
-            <a:r>
-              <a:rPr lang="en-US" sz="4000">
-                <a:solidFill>
-                  <a:srgbClr val="000000"/>
-                </a:solidFill>
-                <a:latin typeface="Arial"/>
-                <a:ea typeface="Arial"/>
-                <a:cs typeface="Arial"/>
-                <a:sym typeface="Arial"/>
-              </a:rPr>
-              <a:t>e</a:t>
-            </a:r>
-            <a:r>
-              <a:rPr lang="en-US" sz="4000">
-                <a:solidFill>
-                  <a:srgbClr val="000000"/>
-                </a:solidFill>
-                <a:latin typeface="Arial"/>
-                <a:ea typeface="Arial"/>
-                <a:cs typeface="Arial"/>
-                <a:sym typeface="Arial"/>
-              </a:rPr>
-              <a:t>d the EEG-Eye Tracking dataset</a:t>
+              <a:t>– Introduced the EEG-Eye Tracking dataset</a:t>
             </a:r>
           </a:p>
           <a:p>
@@ -4798,79 +4864,7 @@
                 <a:cs typeface="Arial"/>
                 <a:sym typeface="Arial"/>
               </a:rPr>
-              <a:t>– Scree</a:t>
-            </a:r>
-            <a:r>
-              <a:rPr lang="en-US" sz="4000">
-                <a:solidFill>
-                  <a:srgbClr val="000000"/>
-                </a:solidFill>
-                <a:latin typeface="Arial"/>
-                <a:ea typeface="Arial"/>
-                <a:cs typeface="Arial"/>
-                <a:sym typeface="Arial"/>
-              </a:rPr>
-              <a:t>n </a:t>
-            </a:r>
-            <a:r>
-              <a:rPr lang="en-US" sz="4000">
-                <a:solidFill>
-                  <a:srgbClr val="000000"/>
-                </a:solidFill>
-                <a:latin typeface="Arial"/>
-                <a:ea typeface="Arial"/>
-                <a:cs typeface="Arial"/>
-                <a:sym typeface="Arial"/>
-              </a:rPr>
-              <a:t>f</a:t>
-            </a:r>
-            <a:r>
-              <a:rPr lang="en-US" sz="4000">
-                <a:solidFill>
-                  <a:srgbClr val="000000"/>
-                </a:solidFill>
-                <a:latin typeface="Arial"/>
-                <a:ea typeface="Arial"/>
-                <a:cs typeface="Arial"/>
-                <a:sym typeface="Arial"/>
-              </a:rPr>
-              <a:t>l</a:t>
-            </a:r>
-            <a:r>
-              <a:rPr lang="en-US" sz="4000">
-                <a:solidFill>
-                  <a:srgbClr val="000000"/>
-                </a:solidFill>
-                <a:latin typeface="Arial"/>
-                <a:ea typeface="Arial"/>
-                <a:cs typeface="Arial"/>
-                <a:sym typeface="Arial"/>
-              </a:rPr>
-              <a:t>a</a:t>
-            </a:r>
-            <a:r>
-              <a:rPr lang="en-US" sz="4000">
-                <a:solidFill>
-                  <a:srgbClr val="000000"/>
-                </a:solidFill>
-                <a:latin typeface="Arial"/>
-                <a:ea typeface="Arial"/>
-                <a:cs typeface="Arial"/>
-                <a:sym typeface="Arial"/>
-              </a:rPr>
-              <a:t>sh</a:t>
-            </a:r>
-            <a:r>
-              <a:rPr lang="en-US" sz="4000">
-                <a:solidFill>
-                  <a:srgbClr val="000000"/>
-                </a:solidFill>
-                <a:latin typeface="Arial"/>
-                <a:ea typeface="Arial"/>
-                <a:cs typeface="Arial"/>
-                <a:sym typeface="Arial"/>
-              </a:rPr>
-              <a:t> stimulation</a:t>
+              <a:t>– Screen flash stimulation</a:t>
             </a:r>
           </a:p>
           <a:p>
@@ -4955,6 +4949,15 @@
                 <a:spcPts val="6160"/>
               </a:lnSpc>
             </a:pPr>
+            <a:endParaRPr lang="en-US" sz="4000">
+              <a:solidFill>
+                <a:srgbClr val="000000"/>
+              </a:solidFill>
+              <a:latin typeface="Arial"/>
+              <a:ea typeface="Arial"/>
+              <a:cs typeface="Arial"/>
+              <a:sym typeface="Arial"/>
+            </a:endParaRPr>
           </a:p>
           <a:p>
             <a:pPr algn="l">
@@ -4962,6 +4965,15 @@
                 <a:spcPts val="6160"/>
               </a:lnSpc>
             </a:pPr>
+            <a:endParaRPr lang="en-US" sz="4000">
+              <a:solidFill>
+                <a:srgbClr val="000000"/>
+              </a:solidFill>
+              <a:latin typeface="Arial"/>
+              <a:ea typeface="Arial"/>
+              <a:cs typeface="Arial"/>
+              <a:sym typeface="Arial"/>
+            </a:endParaRPr>
           </a:p>
           <a:p>
             <a:pPr algn="l">
@@ -4969,17 +4981,26 @@
                 <a:spcPts val="6160"/>
               </a:lnSpc>
             </a:pPr>
-          </a:p>
-        </p:txBody>
-      </p:sp>
-      <p:sp>
-        <p:nvSpPr>
-          <p:cNvPr name="Freeform 12" id="12"/>
+            <a:endParaRPr lang="en-US" sz="4000">
+              <a:solidFill>
+                <a:srgbClr val="000000"/>
+              </a:solidFill>
+              <a:latin typeface="Arial"/>
+              <a:ea typeface="Arial"/>
+              <a:cs typeface="Arial"/>
+              <a:sym typeface="Arial"/>
+            </a:endParaRPr>
+          </a:p>
+        </p:txBody>
+      </p:sp>
+      <p:sp>
+        <p:nvSpPr>
+          <p:cNvPr id="12" name="Freeform 12"/>
           <p:cNvSpPr/>
           <p:nvPr/>
         </p:nvSpPr>
         <p:spPr>
-          <a:xfrm flipH="false" flipV="false" rot="0">
+          <a:xfrm>
             <a:off x="8616167" y="8487582"/>
             <a:ext cx="1055667" cy="1055667"/>
           </a:xfrm>
@@ -4988,9 +5009,9 @@
             <a:gdLst/>
             <a:ahLst/>
             <a:cxnLst/>
-            <a:rect r="r" b="b" t="t" l="l"/>
+            <a:rect l="l" t="t" r="r" b="b"/>
             <a:pathLst>
-              <a:path h="1055667" w="1055667">
+              <a:path w="1055667" h="1055667">
                 <a:moveTo>
                   <a:pt x="0" y="0"/>
                 </a:moveTo>
@@ -5011,27 +5032,34 @@
             </a:pathLst>
           </a:custGeom>
           <a:blipFill>
-            <a:blip r:embed="rId2">
+            <a:blip>
               <a:extLst>
                 <a:ext uri="{96DAC541-7B7A-43D3-8B79-37D633B846F1}">
-                  <asvg:svgBlip xmlns:asvg="http://schemas.microsoft.com/office/drawing/2016/SVG/main" r:embed="rId3"/>
+                  <asvg:svgBlip xmlns:asvg="http://schemas.microsoft.com/office/drawing/2016/SVG/main" r:embed="rId2"/>
                 </a:ext>
               </a:extLst>
             </a:blip>
             <a:stretch>
-              <a:fillRect l="0" t="0" r="0" b="0"/>
+              <a:fillRect/>
             </a:stretch>
           </a:blipFill>
         </p:spPr>
-      </p:sp>
-      <p:sp>
-        <p:nvSpPr>
-          <p:cNvPr name="TextBox 13" id="13"/>
-          <p:cNvSpPr txBox="true"/>
+        <p:txBody>
+          <a:bodyPr/>
+          <a:lstStyle/>
+          <a:p>
+            <a:endParaRPr lang="en-US"/>
+          </a:p>
+        </p:txBody>
+      </p:sp>
+      <p:sp>
+        <p:nvSpPr>
+          <p:cNvPr id="13" name="TextBox 13"/>
+          <p:cNvSpPr txBox="1"/>
           <p:nvPr/>
         </p:nvSpPr>
         <p:spPr>
-          <a:xfrm rot="0">
+          <a:xfrm>
             <a:off x="2892093" y="1266091"/>
             <a:ext cx="12503813" cy="797256"/>
           </a:xfrm>
@@ -5040,7 +5068,7 @@
           </a:prstGeom>
         </p:spPr>
         <p:txBody>
-          <a:bodyPr anchor="t" rtlCol="false" tIns="0" lIns="0" bIns="0" rIns="0">
+          <a:bodyPr lIns="0" tIns="0" rIns="0" bIns="0" rtlCol="0" anchor="t">
             <a:spAutoFit/>
           </a:bodyPr>
           <a:lstStyle/>
@@ -5067,12 +5095,12 @@
       </p:sp>
       <p:sp>
         <p:nvSpPr>
-          <p:cNvPr name="TextBox 14" id="14"/>
-          <p:cNvSpPr txBox="true"/>
+          <p:cNvPr id="14" name="TextBox 14"/>
+          <p:cNvSpPr txBox="1"/>
           <p:nvPr/>
         </p:nvSpPr>
         <p:spPr>
-          <a:xfrm rot="0">
+          <a:xfrm>
             <a:off x="650364" y="1105659"/>
             <a:ext cx="2656876" cy="1805942"/>
           </a:xfrm>
@@ -5081,7 +5109,7 @@
           </a:prstGeom>
         </p:spPr>
         <p:txBody>
-          <a:bodyPr anchor="t" rtlCol="false" tIns="0" lIns="0" bIns="0" rIns="0">
+          <a:bodyPr lIns="0" tIns="0" rIns="0" bIns="0" rtlCol="0" anchor="t">
             <a:spAutoFit/>
           </a:bodyPr>
           <a:lstStyle/>
@@ -5108,12 +5136,12 @@
       </p:sp>
       <p:sp>
         <p:nvSpPr>
-          <p:cNvPr name="TextBox 15" id="15"/>
-          <p:cNvSpPr txBox="true"/>
+          <p:cNvPr id="15" name="TextBox 15"/>
+          <p:cNvSpPr txBox="1"/>
           <p:nvPr/>
         </p:nvSpPr>
         <p:spPr>
-          <a:xfrm rot="0">
+          <a:xfrm>
             <a:off x="650364" y="2706624"/>
             <a:ext cx="17016831" cy="725601"/>
           </a:xfrm>
@@ -5122,16 +5150,16 @@
           </a:prstGeom>
         </p:spPr>
         <p:txBody>
-          <a:bodyPr anchor="t" rtlCol="false" tIns="0" lIns="0" bIns="0" rIns="0">
+          <a:bodyPr lIns="0" tIns="0" rIns="0" bIns="0" rtlCol="0" anchor="t">
             <a:spAutoFit/>
           </a:bodyPr>
           <a:lstStyle/>
           <a:p>
-            <a:pPr algn="l" marL="1209042" indent="-604521" lvl="1">
+            <a:pPr marL="1209042" lvl="1" indent="-604521" algn="l">
               <a:lnSpc>
                 <a:spcPts val="5432"/>
               </a:lnSpc>
-              <a:buAutoNum type="arabicPeriod" startAt="1"/>
+              <a:buAutoNum type="arabicPeriod"/>
             </a:pPr>
             <a:r>
               <a:rPr lang="en-US" sz="5600">
@@ -5143,31 +5171,19 @@
                 <a:cs typeface="League Spartan"/>
                 <a:sym typeface="League Spartan"/>
               </a:rPr>
-              <a:t>What w</a:t>
-            </a:r>
-            <a:r>
-              <a:rPr lang="en-US" sz="5600">
-                <a:solidFill>
-                  <a:srgbClr val="5170FF"/>
-                </a:solidFill>
-                <a:latin typeface="League Spartan"/>
-                <a:ea typeface="League Spartan"/>
-                <a:cs typeface="League Spartan"/>
-                <a:sym typeface="League Spartan"/>
-              </a:rPr>
-              <a:t>e did in the previous presentation</a:t>
-            </a:r>
-          </a:p>
-        </p:txBody>
-      </p:sp>
-      <p:sp>
-        <p:nvSpPr>
-          <p:cNvPr name="Freeform 16" id="16"/>
+              <a:t>What we did in the previous presentation</a:t>
+            </a:r>
+          </a:p>
+        </p:txBody>
+      </p:sp>
+      <p:sp>
+        <p:nvSpPr>
+          <p:cNvPr id="16" name="Freeform 16"/>
           <p:cNvSpPr/>
           <p:nvPr/>
         </p:nvSpPr>
         <p:spPr>
-          <a:xfrm flipH="false" flipV="false" rot="0">
+          <a:xfrm>
             <a:off x="15260222" y="3956099"/>
             <a:ext cx="2143549" cy="2143549"/>
           </a:xfrm>
@@ -5176,9 +5192,9 @@
             <a:gdLst/>
             <a:ahLst/>
             <a:cxnLst/>
-            <a:rect r="r" b="b" t="t" l="l"/>
+            <a:rect l="l" t="t" r="r" b="b"/>
             <a:pathLst>
-              <a:path h="2143549" w="2143549">
+              <a:path w="2143549" h="2143549">
                 <a:moveTo>
                   <a:pt x="0" y="0"/>
                 </a:moveTo>
@@ -5199,27 +5215,34 @@
             </a:pathLst>
           </a:custGeom>
           <a:blipFill>
-            <a:blip r:embed="rId2">
+            <a:blip>
               <a:extLst>
                 <a:ext uri="{96DAC541-7B7A-43D3-8B79-37D633B846F1}">
-                  <asvg:svgBlip xmlns:asvg="http://schemas.microsoft.com/office/drawing/2016/SVG/main" r:embed="rId3"/>
+                  <asvg:svgBlip xmlns:asvg="http://schemas.microsoft.com/office/drawing/2016/SVG/main" r:embed="rId2"/>
                 </a:ext>
               </a:extLst>
             </a:blip>
             <a:stretch>
-              <a:fillRect l="0" t="0" r="0" b="0"/>
+              <a:fillRect/>
             </a:stretch>
           </a:blipFill>
         </p:spPr>
-      </p:sp>
-      <p:sp>
-        <p:nvSpPr>
-          <p:cNvPr name="Freeform 17" id="17"/>
+        <p:txBody>
+          <a:bodyPr/>
+          <a:lstStyle/>
+          <a:p>
+            <a:endParaRPr lang="en-US"/>
+          </a:p>
+        </p:txBody>
+      </p:sp>
+      <p:sp>
+        <p:nvSpPr>
+          <p:cNvPr id="17" name="Freeform 17"/>
           <p:cNvSpPr/>
           <p:nvPr/>
         </p:nvSpPr>
         <p:spPr>
-          <a:xfrm flipH="false" flipV="false" rot="0">
+          <a:xfrm>
             <a:off x="0" y="7453043"/>
             <a:ext cx="1368515" cy="1368515"/>
           </a:xfrm>
@@ -5228,9 +5251,9 @@
             <a:gdLst/>
             <a:ahLst/>
             <a:cxnLst/>
-            <a:rect r="r" b="b" t="t" l="l"/>
+            <a:rect l="l" t="t" r="r" b="b"/>
             <a:pathLst>
-              <a:path h="1368515" w="1368515">
+              <a:path w="1368515" h="1368515">
                 <a:moveTo>
                   <a:pt x="0" y="0"/>
                 </a:moveTo>
@@ -5251,27 +5274,34 @@
             </a:pathLst>
           </a:custGeom>
           <a:blipFill>
-            <a:blip r:embed="rId2">
+            <a:blip>
               <a:extLst>
                 <a:ext uri="{96DAC541-7B7A-43D3-8B79-37D633B846F1}">
-                  <asvg:svgBlip xmlns:asvg="http://schemas.microsoft.com/office/drawing/2016/SVG/main" r:embed="rId3"/>
+                  <asvg:svgBlip xmlns:asvg="http://schemas.microsoft.com/office/drawing/2016/SVG/main" r:embed="rId2"/>
                 </a:ext>
               </a:extLst>
             </a:blip>
             <a:stretch>
-              <a:fillRect l="0" t="0" r="0" b="0"/>
+              <a:fillRect/>
             </a:stretch>
           </a:blipFill>
         </p:spPr>
-      </p:sp>
-      <p:sp>
-        <p:nvSpPr>
-          <p:cNvPr name="TextBox 18" id="18"/>
-          <p:cNvSpPr txBox="true"/>
+        <p:txBody>
+          <a:bodyPr/>
+          <a:lstStyle/>
+          <a:p>
+            <a:endParaRPr lang="en-US"/>
+          </a:p>
+        </p:txBody>
+      </p:sp>
+      <p:sp>
+        <p:nvSpPr>
+          <p:cNvPr id="18" name="TextBox 18"/>
+          <p:cNvSpPr txBox="1"/>
           <p:nvPr/>
         </p:nvSpPr>
         <p:spPr>
-          <a:xfrm rot="0">
+          <a:xfrm>
             <a:off x="17259300" y="9210675"/>
             <a:ext cx="152400" cy="200025"/>
           </a:xfrm>
@@ -5280,7 +5310,7 @@
           </a:prstGeom>
         </p:spPr>
         <p:txBody>
-          <a:bodyPr anchor="t" rtlCol="false" tIns="0" lIns="0" bIns="0" rIns="0" wrap="none">
+          <a:bodyPr wrap="none" lIns="0" tIns="0" rIns="0" bIns="0" rtlCol="0" anchor="t">
             <a:spAutoFit/>
           </a:bodyPr>
           <a:lstStyle/>
@@ -5317,7 +5347,7 @@
 </file>
 
 <file path=ppt/slides/slide4.xml><?xml version="1.0" encoding="utf-8"?>
-<p:sld xmlns:p="http://schemas.openxmlformats.org/presentationml/2006/main" xmlns:a="http://schemas.openxmlformats.org/drawingml/2006/main" xmlns:r="http://schemas.openxmlformats.org/officeDocument/2006/relationships">
+<p:sld xmlns:a="http://schemas.openxmlformats.org/drawingml/2006/main" xmlns:r="http://schemas.openxmlformats.org/officeDocument/2006/relationships" xmlns:p="http://schemas.openxmlformats.org/presentationml/2006/main">
   <p:cSld>
     <p:spTree>
       <p:nvGrpSpPr>
@@ -5335,12 +5365,12 @@
       </p:grpSpPr>
       <p:grpSp>
         <p:nvGrpSpPr>
-          <p:cNvPr name="Group 2" id="2"/>
+          <p:cNvPr id="2" name="Group 2"/>
           <p:cNvGrpSpPr/>
           <p:nvPr/>
         </p:nvGrpSpPr>
         <p:grpSpPr>
-          <a:xfrm rot="0">
+          <a:xfrm>
             <a:off x="0" y="9775281"/>
             <a:ext cx="18288000" cy="725646"/>
             <a:chOff x="0" y="0"/>
@@ -5349,12 +5379,12 @@
         </p:grpSpPr>
         <p:sp>
           <p:nvSpPr>
-            <p:cNvPr name="Freeform 3" id="3"/>
+            <p:cNvPr id="3" name="Freeform 3"/>
             <p:cNvSpPr/>
             <p:nvPr/>
           </p:nvSpPr>
           <p:spPr>
-            <a:xfrm flipH="false" flipV="false" rot="0">
+            <a:xfrm>
               <a:off x="0" y="0"/>
               <a:ext cx="4816592" cy="191117"/>
             </a:xfrm>
@@ -5363,9 +5393,9 @@
               <a:gdLst/>
               <a:ahLst/>
               <a:cxnLst/>
-              <a:rect r="r" b="b" t="t" l="l"/>
+              <a:rect l="l" t="t" r="r" b="b"/>
               <a:pathLst>
-                <a:path h="191117" w="4816592">
+                <a:path w="4816592" h="191117">
                   <a:moveTo>
                     <a:pt x="0" y="0"/>
                   </a:moveTo>
@@ -5386,11 +5416,18 @@
               <a:srgbClr val="07223B"/>
             </a:solidFill>
           </p:spPr>
+          <p:txBody>
+            <a:bodyPr/>
+            <a:lstStyle/>
+            <a:p>
+              <a:endParaRPr lang="en-US"/>
+            </a:p>
+          </p:txBody>
         </p:sp>
         <p:sp>
           <p:nvSpPr>
-            <p:cNvPr name="TextBox 4" id="4"/>
-            <p:cNvSpPr txBox="true"/>
+            <p:cNvPr id="4" name="TextBox 4"/>
+            <p:cNvSpPr txBox="1"/>
             <p:nvPr/>
           </p:nvSpPr>
           <p:spPr>
@@ -5403,7 +5440,7 @@
             </a:prstGeom>
           </p:spPr>
           <p:txBody>
-            <a:bodyPr anchor="ctr" rtlCol="false" tIns="50800" lIns="50800" bIns="50800" rIns="50800"/>
+            <a:bodyPr lIns="50800" tIns="50800" rIns="50800" bIns="50800" rtlCol="0" anchor="ctr"/>
             <a:lstStyle/>
             <a:p>
               <a:pPr algn="ctr">
@@ -5411,18 +5448,19 @@
                   <a:spcPts val="2659"/>
                 </a:lnSpc>
               </a:pPr>
+              <a:endParaRPr/>
             </a:p>
           </p:txBody>
         </p:sp>
       </p:grpSp>
       <p:grpSp>
         <p:nvGrpSpPr>
-          <p:cNvPr name="Group 5" id="5"/>
+          <p:cNvPr id="5" name="Group 5"/>
           <p:cNvGrpSpPr/>
           <p:nvPr/>
         </p:nvGrpSpPr>
         <p:grpSpPr>
-          <a:xfrm rot="0">
+          <a:xfrm>
             <a:off x="-692004" y="1613850"/>
             <a:ext cx="19672009" cy="10049024"/>
             <a:chOff x="0" y="0"/>
@@ -5431,12 +5469,12 @@
         </p:grpSpPr>
         <p:sp>
           <p:nvSpPr>
-            <p:cNvPr name="Freeform 6" id="6"/>
+            <p:cNvPr id="6" name="Freeform 6"/>
             <p:cNvSpPr/>
             <p:nvPr/>
           </p:nvSpPr>
           <p:spPr>
-            <a:xfrm flipH="false" flipV="false" rot="0">
+            <a:xfrm>
               <a:off x="0" y="0"/>
               <a:ext cx="5181105" cy="2646657"/>
             </a:xfrm>
@@ -5445,9 +5483,9 @@
               <a:gdLst/>
               <a:ahLst/>
               <a:cxnLst/>
-              <a:rect r="r" b="b" t="t" l="l"/>
+              <a:rect l="l" t="t" r="r" b="b"/>
               <a:pathLst>
-                <a:path h="2646657" w="5181105">
+                <a:path w="5181105" h="2646657">
                   <a:moveTo>
                     <a:pt x="0" y="0"/>
                   </a:moveTo>
@@ -5472,11 +5510,18 @@
               <a:miter/>
             </a:ln>
           </p:spPr>
+          <p:txBody>
+            <a:bodyPr/>
+            <a:lstStyle/>
+            <a:p>
+              <a:endParaRPr lang="en-US"/>
+            </a:p>
+          </p:txBody>
         </p:sp>
         <p:sp>
           <p:nvSpPr>
-            <p:cNvPr name="TextBox 7" id="7"/>
-            <p:cNvSpPr txBox="true"/>
+            <p:cNvPr id="7" name="TextBox 7"/>
+            <p:cNvSpPr txBox="1"/>
             <p:nvPr/>
           </p:nvSpPr>
           <p:spPr>
@@ -5489,7 +5534,7 @@
             </a:prstGeom>
           </p:spPr>
           <p:txBody>
-            <a:bodyPr anchor="ctr" rtlCol="false" tIns="50800" lIns="50800" bIns="50800" rIns="50800"/>
+            <a:bodyPr lIns="50800" tIns="50800" rIns="50800" bIns="50800" rtlCol="0" anchor="ctr"/>
             <a:lstStyle/>
             <a:p>
               <a:pPr algn="ctr">
@@ -5497,18 +5542,19 @@
                   <a:spcPts val="2659"/>
                 </a:lnSpc>
               </a:pPr>
+              <a:endParaRPr/>
             </a:p>
           </p:txBody>
         </p:sp>
       </p:grpSp>
       <p:grpSp>
         <p:nvGrpSpPr>
-          <p:cNvPr name="Group 8" id="8"/>
+          <p:cNvPr id="8" name="Group 8"/>
           <p:cNvGrpSpPr/>
           <p:nvPr/>
         </p:nvGrpSpPr>
         <p:grpSpPr>
-          <a:xfrm rot="0">
+          <a:xfrm>
             <a:off x="1028700" y="759724"/>
             <a:ext cx="12503813" cy="1686167"/>
             <a:chOff x="0" y="0"/>
@@ -5517,12 +5563,12 @@
         </p:grpSpPr>
         <p:sp>
           <p:nvSpPr>
-            <p:cNvPr name="Freeform 9" id="9"/>
+            <p:cNvPr id="9" name="Freeform 9"/>
             <p:cNvSpPr/>
             <p:nvPr/>
           </p:nvSpPr>
           <p:spPr>
-            <a:xfrm flipH="false" flipV="false" rot="0">
+            <a:xfrm>
               <a:off x="0" y="0"/>
               <a:ext cx="3293185" cy="444093"/>
             </a:xfrm>
@@ -5531,9 +5577,9 @@
               <a:gdLst/>
               <a:ahLst/>
               <a:cxnLst/>
-              <a:rect r="r" b="b" t="t" l="l"/>
+              <a:rect l="l" t="t" r="r" b="b"/>
               <a:pathLst>
-                <a:path h="444093" w="3293185">
+                <a:path w="3293185" h="444093">
                   <a:moveTo>
                     <a:pt x="0" y="0"/>
                   </a:moveTo>
@@ -5559,11 +5605,18 @@
               <a:miter/>
             </a:ln>
           </p:spPr>
+          <p:txBody>
+            <a:bodyPr/>
+            <a:lstStyle/>
+            <a:p>
+              <a:endParaRPr lang="en-US"/>
+            </a:p>
+          </p:txBody>
         </p:sp>
         <p:sp>
           <p:nvSpPr>
-            <p:cNvPr name="TextBox 10" id="10"/>
-            <p:cNvSpPr txBox="true"/>
+            <p:cNvPr id="10" name="TextBox 10"/>
+            <p:cNvSpPr txBox="1"/>
             <p:nvPr/>
           </p:nvSpPr>
           <p:spPr>
@@ -5576,7 +5629,7 @@
             </a:prstGeom>
           </p:spPr>
           <p:txBody>
-            <a:bodyPr anchor="ctr" rtlCol="false" tIns="50800" lIns="50800" bIns="50800" rIns="50800"/>
+            <a:bodyPr lIns="50800" tIns="50800" rIns="50800" bIns="50800" rtlCol="0" anchor="ctr"/>
             <a:lstStyle/>
             <a:p>
               <a:pPr algn="ctr">
@@ -5584,18 +5637,19 @@
                   <a:spcPts val="2659"/>
                 </a:lnSpc>
               </a:pPr>
+              <a:endParaRPr/>
             </a:p>
           </p:txBody>
         </p:sp>
       </p:grpSp>
       <p:sp>
         <p:nvSpPr>
-          <p:cNvPr name="TextBox 11" id="11"/>
-          <p:cNvSpPr txBox="true"/>
+          <p:cNvPr id="11" name="TextBox 11"/>
+          <p:cNvSpPr txBox="1"/>
           <p:nvPr/>
         </p:nvSpPr>
         <p:spPr>
-          <a:xfrm rot="0">
+          <a:xfrm>
             <a:off x="2892093" y="1277134"/>
             <a:ext cx="12503813" cy="797256"/>
           </a:xfrm>
@@ -5604,7 +5658,7 @@
           </a:prstGeom>
         </p:spPr>
         <p:txBody>
-          <a:bodyPr anchor="t" rtlCol="false" tIns="0" lIns="0" bIns="0" rIns="0">
+          <a:bodyPr lIns="0" tIns="0" rIns="0" bIns="0" rtlCol="0" anchor="t">
             <a:spAutoFit/>
           </a:bodyPr>
           <a:lstStyle/>
@@ -5631,12 +5685,12 @@
       </p:sp>
       <p:sp>
         <p:nvSpPr>
-          <p:cNvPr name="TextBox 12" id="12"/>
-          <p:cNvSpPr txBox="true"/>
+          <p:cNvPr id="12" name="TextBox 12"/>
+          <p:cNvSpPr txBox="1"/>
           <p:nvPr/>
         </p:nvSpPr>
         <p:spPr>
-          <a:xfrm rot="0">
+          <a:xfrm>
             <a:off x="650364" y="1105659"/>
             <a:ext cx="2656876" cy="1805907"/>
           </a:xfrm>
@@ -5645,7 +5699,7 @@
           </a:prstGeom>
         </p:spPr>
         <p:txBody>
-          <a:bodyPr anchor="t" rtlCol="false" tIns="0" lIns="0" bIns="0" rIns="0">
+          <a:bodyPr lIns="0" tIns="0" rIns="0" bIns="0" rtlCol="0" anchor="t">
             <a:spAutoFit/>
           </a:bodyPr>
           <a:lstStyle/>
@@ -5672,12 +5726,12 @@
       </p:sp>
       <p:sp>
         <p:nvSpPr>
-          <p:cNvPr name="Freeform 13" id="13"/>
+          <p:cNvPr id="13" name="Freeform 13"/>
           <p:cNvSpPr/>
           <p:nvPr/>
         </p:nvSpPr>
         <p:spPr>
-          <a:xfrm flipH="false" flipV="false" rot="0">
+          <a:xfrm>
             <a:off x="0" y="8222617"/>
             <a:ext cx="1368515" cy="1368515"/>
           </a:xfrm>
@@ -5686,9 +5740,9 @@
             <a:gdLst/>
             <a:ahLst/>
             <a:cxnLst/>
-            <a:rect r="r" b="b" t="t" l="l"/>
+            <a:rect l="l" t="t" r="r" b="b"/>
             <a:pathLst>
-              <a:path h="1368515" w="1368515">
+              <a:path w="1368515" h="1368515">
                 <a:moveTo>
                   <a:pt x="0" y="0"/>
                 </a:moveTo>
@@ -5709,27 +5763,34 @@
             </a:pathLst>
           </a:custGeom>
           <a:blipFill>
-            <a:blip r:embed="rId2">
+            <a:blip>
               <a:extLst>
                 <a:ext uri="{96DAC541-7B7A-43D3-8B79-37D633B846F1}">
-                  <asvg:svgBlip xmlns:asvg="http://schemas.microsoft.com/office/drawing/2016/SVG/main" r:embed="rId3"/>
+                  <asvg:svgBlip xmlns:asvg="http://schemas.microsoft.com/office/drawing/2016/SVG/main" r:embed="rId2"/>
                 </a:ext>
               </a:extLst>
             </a:blip>
             <a:stretch>
-              <a:fillRect l="0" t="0" r="0" b="0"/>
+              <a:fillRect/>
             </a:stretch>
           </a:blipFill>
         </p:spPr>
-      </p:sp>
-      <p:sp>
-        <p:nvSpPr>
-          <p:cNvPr name="TextBox 14" id="14"/>
-          <p:cNvSpPr txBox="true"/>
+        <p:txBody>
+          <a:bodyPr/>
+          <a:lstStyle/>
+          <a:p>
+            <a:endParaRPr lang="en-US"/>
+          </a:p>
+        </p:txBody>
+      </p:sp>
+      <p:sp>
+        <p:nvSpPr>
+          <p:cNvPr id="14" name="TextBox 14"/>
+          <p:cNvSpPr txBox="1"/>
           <p:nvPr/>
         </p:nvSpPr>
         <p:spPr>
-          <a:xfrm rot="0">
+          <a:xfrm>
             <a:off x="1273808" y="3422650"/>
             <a:ext cx="16377323" cy="6999604"/>
           </a:xfrm>
@@ -5738,7 +5799,7 @@
           </a:prstGeom>
         </p:spPr>
         <p:txBody>
-          <a:bodyPr anchor="t" rtlCol="false" tIns="0" lIns="0" bIns="0" rIns="0">
+          <a:bodyPr lIns="0" tIns="0" rIns="0" bIns="0" rtlCol="0" anchor="t">
             <a:spAutoFit/>
           </a:bodyPr>
           <a:lstStyle/>
@@ -5843,6 +5904,15 @@
                 <a:spcPts val="6160"/>
               </a:lnSpc>
             </a:pPr>
+            <a:endParaRPr lang="en-US" sz="4000">
+              <a:solidFill>
+                <a:srgbClr val="000000"/>
+              </a:solidFill>
+              <a:latin typeface="Arial"/>
+              <a:ea typeface="Arial"/>
+              <a:cs typeface="Arial"/>
+              <a:sym typeface="Arial"/>
+            </a:endParaRPr>
           </a:p>
           <a:p>
             <a:pPr algn="l">
@@ -5850,6 +5920,15 @@
                 <a:spcPts val="6160"/>
               </a:lnSpc>
             </a:pPr>
+            <a:endParaRPr lang="en-US" sz="4000">
+              <a:solidFill>
+                <a:srgbClr val="000000"/>
+              </a:solidFill>
+              <a:latin typeface="Arial"/>
+              <a:ea typeface="Arial"/>
+              <a:cs typeface="Arial"/>
+              <a:sym typeface="Arial"/>
+            </a:endParaRPr>
           </a:p>
           <a:p>
             <a:pPr algn="l">
@@ -5857,6 +5936,15 @@
                 <a:spcPts val="6160"/>
               </a:lnSpc>
             </a:pPr>
+            <a:endParaRPr lang="en-US" sz="4000">
+              <a:solidFill>
+                <a:srgbClr val="000000"/>
+              </a:solidFill>
+              <a:latin typeface="Arial"/>
+              <a:ea typeface="Arial"/>
+              <a:cs typeface="Arial"/>
+              <a:sym typeface="Arial"/>
+            </a:endParaRPr>
           </a:p>
           <a:p>
             <a:pPr algn="l">
@@ -5864,17 +5952,26 @@
                 <a:spcPts val="6160"/>
               </a:lnSpc>
             </a:pPr>
-          </a:p>
-        </p:txBody>
-      </p:sp>
-      <p:sp>
-        <p:nvSpPr>
-          <p:cNvPr name="TextBox 15" id="15"/>
-          <p:cNvSpPr txBox="true"/>
+            <a:endParaRPr lang="en-US" sz="4000">
+              <a:solidFill>
+                <a:srgbClr val="000000"/>
+              </a:solidFill>
+              <a:latin typeface="Arial"/>
+              <a:ea typeface="Arial"/>
+              <a:cs typeface="Arial"/>
+              <a:sym typeface="Arial"/>
+            </a:endParaRPr>
+          </a:p>
+        </p:txBody>
+      </p:sp>
+      <p:sp>
+        <p:nvSpPr>
+          <p:cNvPr id="15" name="TextBox 15"/>
+          <p:cNvSpPr txBox="1"/>
           <p:nvPr/>
         </p:nvSpPr>
         <p:spPr>
-          <a:xfrm rot="0">
+          <a:xfrm>
             <a:off x="650364" y="2706624"/>
             <a:ext cx="17016831" cy="725601"/>
           </a:xfrm>
@@ -5883,16 +5980,16 @@
           </a:prstGeom>
         </p:spPr>
         <p:txBody>
-          <a:bodyPr anchor="t" rtlCol="false" tIns="0" lIns="0" bIns="0" rIns="0">
+          <a:bodyPr lIns="0" tIns="0" rIns="0" bIns="0" rtlCol="0" anchor="t">
             <a:spAutoFit/>
           </a:bodyPr>
           <a:lstStyle/>
           <a:p>
-            <a:pPr algn="l" marL="1209042" indent="-604521" lvl="1">
+            <a:pPr marL="1209042" lvl="1" indent="-604521" algn="l">
               <a:lnSpc>
                 <a:spcPts val="5432"/>
               </a:lnSpc>
-              <a:buAutoNum type="arabicPeriod" startAt="1"/>
+              <a:buAutoNum type="arabicPeriod"/>
             </a:pPr>
             <a:r>
               <a:rPr lang="en-US" sz="5600">
@@ -5904,31 +6001,19 @@
                 <a:cs typeface="League Spartan"/>
                 <a:sym typeface="League Spartan"/>
               </a:rPr>
-              <a:t>Data</a:t>
-            </a:r>
-            <a:r>
-              <a:rPr lang="en-US" sz="5600">
-                <a:solidFill>
-                  <a:srgbClr val="5170FF"/>
-                </a:solidFill>
-                <a:latin typeface="League Spartan"/>
-                <a:ea typeface="League Spartan"/>
-                <a:cs typeface="League Spartan"/>
-                <a:sym typeface="League Spartan"/>
-              </a:rPr>
-              <a:t> preprocessing</a:t>
-            </a:r>
-          </a:p>
-        </p:txBody>
-      </p:sp>
-      <p:sp>
-        <p:nvSpPr>
-          <p:cNvPr name="TextBox 16" id="16"/>
-          <p:cNvSpPr txBox="true"/>
+              <a:t>Data preprocessing</a:t>
+            </a:r>
+          </a:p>
+        </p:txBody>
+      </p:sp>
+      <p:sp>
+        <p:nvSpPr>
+          <p:cNvPr id="16" name="TextBox 16"/>
+          <p:cNvSpPr txBox="1"/>
           <p:nvPr/>
         </p:nvSpPr>
         <p:spPr>
-          <a:xfrm rot="0">
+          <a:xfrm>
             <a:off x="1652144" y="8363043"/>
             <a:ext cx="16377323" cy="2313304"/>
           </a:xfrm>
@@ -5937,7 +6022,7 @@
           </a:prstGeom>
         </p:spPr>
         <p:txBody>
-          <a:bodyPr anchor="t" rtlCol="false" tIns="0" lIns="0" bIns="0" rIns="0">
+          <a:bodyPr lIns="0" tIns="0" rIns="0" bIns="0" rtlCol="0" anchor="t">
             <a:spAutoFit/>
           </a:bodyPr>
           <a:lstStyle/>
@@ -5966,6 +6051,15 @@
                 <a:spcPts val="6160"/>
               </a:lnSpc>
             </a:pPr>
+            <a:endParaRPr lang="en-US" sz="4000">
+              <a:solidFill>
+                <a:srgbClr val="000000"/>
+              </a:solidFill>
+              <a:latin typeface="Arial"/>
+              <a:ea typeface="Arial"/>
+              <a:cs typeface="Arial"/>
+              <a:sym typeface="Arial"/>
+            </a:endParaRPr>
           </a:p>
           <a:p>
             <a:pPr algn="l">
@@ -5973,17 +6067,26 @@
                 <a:spcPts val="6160"/>
               </a:lnSpc>
             </a:pPr>
-          </a:p>
-        </p:txBody>
-      </p:sp>
-      <p:sp>
-        <p:nvSpPr>
-          <p:cNvPr name="TextBox 17" id="17"/>
-          <p:cNvSpPr txBox="true"/>
+            <a:endParaRPr lang="en-US" sz="4000">
+              <a:solidFill>
+                <a:srgbClr val="000000"/>
+              </a:solidFill>
+              <a:latin typeface="Arial"/>
+              <a:ea typeface="Arial"/>
+              <a:cs typeface="Arial"/>
+              <a:sym typeface="Arial"/>
+            </a:endParaRPr>
+          </a:p>
+        </p:txBody>
+      </p:sp>
+      <p:sp>
+        <p:nvSpPr>
+          <p:cNvPr id="17" name="TextBox 17"/>
+          <p:cNvSpPr txBox="1"/>
           <p:nvPr/>
         </p:nvSpPr>
         <p:spPr>
-          <a:xfrm rot="0">
+          <a:xfrm>
             <a:off x="1028700" y="7647017"/>
             <a:ext cx="17016831" cy="725601"/>
           </a:xfrm>
@@ -5992,16 +6095,16 @@
           </a:prstGeom>
         </p:spPr>
         <p:txBody>
-          <a:bodyPr anchor="t" rtlCol="false" tIns="0" lIns="0" bIns="0" rIns="0">
+          <a:bodyPr lIns="0" tIns="0" rIns="0" bIns="0" rtlCol="0" anchor="t">
             <a:spAutoFit/>
           </a:bodyPr>
           <a:lstStyle/>
           <a:p>
-            <a:pPr algn="l" marL="1209042" indent="-604521" lvl="1">
+            <a:pPr marL="1209042" lvl="1" indent="-604521" algn="l">
               <a:lnSpc>
                 <a:spcPts val="5432"/>
               </a:lnSpc>
-              <a:buAutoNum type="arabicPeriod" startAt="1"/>
+              <a:buAutoNum type="arabicPeriod"/>
             </a:pPr>
             <a:r>
               <a:rPr lang="en-US" sz="5600">
@@ -6013,31 +6116,19 @@
                 <a:cs typeface="League Spartan"/>
                 <a:sym typeface="League Spartan"/>
               </a:rPr>
-              <a:t>Channel</a:t>
-            </a:r>
-            <a:r>
-              <a:rPr lang="en-US" sz="5600">
-                <a:solidFill>
-                  <a:srgbClr val="5170FF"/>
-                </a:solidFill>
-                <a:latin typeface="League Spartan"/>
-                <a:ea typeface="League Spartan"/>
-                <a:cs typeface="League Spartan"/>
-                <a:sym typeface="League Spartan"/>
-              </a:rPr>
-              <a:t> selection </a:t>
-            </a:r>
-          </a:p>
-        </p:txBody>
-      </p:sp>
-      <p:sp>
-        <p:nvSpPr>
-          <p:cNvPr name="TextBox 18" id="18"/>
-          <p:cNvSpPr txBox="true"/>
+              <a:t>Channel selection </a:t>
+            </a:r>
+          </a:p>
+        </p:txBody>
+      </p:sp>
+      <p:sp>
+        <p:nvSpPr>
+          <p:cNvPr id="18" name="TextBox 18"/>
+          <p:cNvSpPr txBox="1"/>
           <p:nvPr/>
         </p:nvSpPr>
         <p:spPr>
-          <a:xfrm rot="0">
+          <a:xfrm>
             <a:off x="17259300" y="9210675"/>
             <a:ext cx="152400" cy="200025"/>
           </a:xfrm>
@@ -6046,7 +6137,7 @@
           </a:prstGeom>
         </p:spPr>
         <p:txBody>
-          <a:bodyPr anchor="t" rtlCol="false" tIns="0" lIns="0" bIns="0" rIns="0" wrap="none">
+          <a:bodyPr wrap="none" lIns="0" tIns="0" rIns="0" bIns="0" rtlCol="0" anchor="t">
             <a:spAutoFit/>
           </a:bodyPr>
           <a:lstStyle/>
@@ -6083,7 +6174,7 @@
 </file>
 
 <file path=ppt/slides/slide5.xml><?xml version="1.0" encoding="utf-8"?>
-<p:sld xmlns:p="http://schemas.openxmlformats.org/presentationml/2006/main" xmlns:a="http://schemas.openxmlformats.org/drawingml/2006/main" xmlns:r="http://schemas.openxmlformats.org/officeDocument/2006/relationships">
+<p:sld xmlns:a="http://schemas.openxmlformats.org/drawingml/2006/main" xmlns:r="http://schemas.openxmlformats.org/officeDocument/2006/relationships" xmlns:p="http://schemas.openxmlformats.org/presentationml/2006/main">
   <p:cSld>
     <p:spTree>
       <p:nvGrpSpPr>
@@ -6101,12 +6192,12 @@
       </p:grpSpPr>
       <p:sp>
         <p:nvSpPr>
-          <p:cNvPr name="Freeform 2" id="2"/>
+          <p:cNvPr id="2" name="Freeform 2"/>
           <p:cNvSpPr/>
           <p:nvPr/>
         </p:nvSpPr>
         <p:spPr>
-          <a:xfrm flipH="false" flipV="false" rot="0">
+          <a:xfrm>
             <a:off x="4647938" y="514350"/>
             <a:ext cx="8992124" cy="9258300"/>
           </a:xfrm>
@@ -6115,9 +6206,9 @@
             <a:gdLst/>
             <a:ahLst/>
             <a:cxnLst/>
-            <a:rect r="r" b="b" t="t" l="l"/>
+            <a:rect l="l" t="t" r="r" b="b"/>
             <a:pathLst>
-              <a:path h="9258300" w="8992124">
+              <a:path w="8992124" h="9258300">
                 <a:moveTo>
                   <a:pt x="0" y="0"/>
                 </a:moveTo>
@@ -6140,19 +6231,26 @@
           <a:blipFill>
             <a:blip r:embed="rId2"/>
             <a:stretch>
-              <a:fillRect l="0" t="0" r="0" b="0"/>
+              <a:fillRect/>
             </a:stretch>
           </a:blipFill>
         </p:spPr>
-      </p:sp>
-      <p:sp>
-        <p:nvSpPr>
-          <p:cNvPr name="TextBox 3" id="3"/>
-          <p:cNvSpPr txBox="true"/>
+        <p:txBody>
+          <a:bodyPr/>
+          <a:lstStyle/>
+          <a:p>
+            <a:endParaRPr lang="en-US"/>
+          </a:p>
+        </p:txBody>
+      </p:sp>
+      <p:sp>
+        <p:nvSpPr>
+          <p:cNvPr id="3" name="TextBox 3"/>
+          <p:cNvSpPr txBox="1"/>
           <p:nvPr/>
         </p:nvSpPr>
         <p:spPr>
-          <a:xfrm rot="0">
+          <a:xfrm>
             <a:off x="17259300" y="9210675"/>
             <a:ext cx="152400" cy="200025"/>
           </a:xfrm>
@@ -6161,7 +6259,7 @@
           </a:prstGeom>
         </p:spPr>
         <p:txBody>
-          <a:bodyPr anchor="t" rtlCol="false" tIns="0" lIns="0" bIns="0" rIns="0" wrap="none">
+          <a:bodyPr wrap="none" lIns="0" tIns="0" rIns="0" bIns="0" rtlCol="0" anchor="t">
             <a:spAutoFit/>
           </a:bodyPr>
           <a:lstStyle/>
@@ -6191,12 +6289,12 @@
       </p:sp>
       <p:grpSp>
         <p:nvGrpSpPr>
-          <p:cNvPr name="Group 4" id="4"/>
+          <p:cNvPr id="4" name="Group 4"/>
           <p:cNvGrpSpPr/>
           <p:nvPr/>
         </p:nvGrpSpPr>
         <p:grpSpPr>
-          <a:xfrm rot="0">
+          <a:xfrm>
             <a:off x="0" y="9775281"/>
             <a:ext cx="18288000" cy="725646"/>
             <a:chOff x="0" y="0"/>
@@ -6205,12 +6303,12 @@
         </p:grpSpPr>
         <p:sp>
           <p:nvSpPr>
-            <p:cNvPr name="Freeform 5" id="5"/>
+            <p:cNvPr id="5" name="Freeform 5"/>
             <p:cNvSpPr/>
             <p:nvPr/>
           </p:nvSpPr>
           <p:spPr>
-            <a:xfrm flipH="false" flipV="false" rot="0">
+            <a:xfrm>
               <a:off x="0" y="0"/>
               <a:ext cx="4816592" cy="191117"/>
             </a:xfrm>
@@ -6219,9 +6317,9 @@
               <a:gdLst/>
               <a:ahLst/>
               <a:cxnLst/>
-              <a:rect r="r" b="b" t="t" l="l"/>
+              <a:rect l="l" t="t" r="r" b="b"/>
               <a:pathLst>
-                <a:path h="191117" w="4816592">
+                <a:path w="4816592" h="191117">
                   <a:moveTo>
                     <a:pt x="0" y="0"/>
                   </a:moveTo>
@@ -6242,11 +6340,18 @@
               <a:srgbClr val="07223B"/>
             </a:solidFill>
           </p:spPr>
+          <p:txBody>
+            <a:bodyPr/>
+            <a:lstStyle/>
+            <a:p>
+              <a:endParaRPr lang="en-US"/>
+            </a:p>
+          </p:txBody>
         </p:sp>
         <p:sp>
           <p:nvSpPr>
-            <p:cNvPr name="TextBox 6" id="6"/>
-            <p:cNvSpPr txBox="true"/>
+            <p:cNvPr id="6" name="TextBox 6"/>
+            <p:cNvSpPr txBox="1"/>
             <p:nvPr/>
           </p:nvSpPr>
           <p:spPr>
@@ -6259,7 +6364,7 @@
             </a:prstGeom>
           </p:spPr>
           <p:txBody>
-            <a:bodyPr anchor="ctr" rtlCol="false" tIns="50800" lIns="50800" bIns="50800" rIns="50800"/>
+            <a:bodyPr lIns="50800" tIns="50800" rIns="50800" bIns="50800" rtlCol="0" anchor="ctr"/>
             <a:lstStyle/>
             <a:p>
               <a:pPr algn="ctr">
@@ -6267,6 +6372,7 @@
                   <a:spcPts val="2659"/>
                 </a:lnSpc>
               </a:pPr>
+              <a:endParaRPr/>
             </a:p>
           </p:txBody>
         </p:sp>
@@ -6280,7 +6386,7 @@
 </file>
 
 <file path=ppt/slides/slide6.xml><?xml version="1.0" encoding="utf-8"?>
-<p:sld xmlns:p="http://schemas.openxmlformats.org/presentationml/2006/main" xmlns:a="http://schemas.openxmlformats.org/drawingml/2006/main" xmlns:r="http://schemas.openxmlformats.org/officeDocument/2006/relationships">
+<p:sld xmlns:a="http://schemas.openxmlformats.org/drawingml/2006/main" xmlns:r="http://schemas.openxmlformats.org/officeDocument/2006/relationships" xmlns:p="http://schemas.openxmlformats.org/presentationml/2006/main">
   <p:cSld>
     <p:spTree>
       <p:nvGrpSpPr>
@@ -6298,12 +6404,12 @@
       </p:grpSpPr>
       <p:sp>
         <p:nvSpPr>
-          <p:cNvPr name="Freeform 2" id="2"/>
+          <p:cNvPr id="2" name="Freeform 2"/>
           <p:cNvSpPr/>
           <p:nvPr/>
         </p:nvSpPr>
         <p:spPr>
-          <a:xfrm flipH="false" flipV="false" rot="0">
+          <a:xfrm>
             <a:off x="2410536" y="1885157"/>
             <a:ext cx="13466928" cy="7373143"/>
           </a:xfrm>
@@ -6312,9 +6418,9 @@
             <a:gdLst/>
             <a:ahLst/>
             <a:cxnLst/>
-            <a:rect r="r" b="b" t="t" l="l"/>
+            <a:rect l="l" t="t" r="r" b="b"/>
             <a:pathLst>
-              <a:path h="7373143" w="13466928">
+              <a:path w="13466928" h="7373143">
                 <a:moveTo>
                   <a:pt x="0" y="0"/>
                 </a:moveTo>
@@ -6337,19 +6443,26 @@
           <a:blipFill>
             <a:blip r:embed="rId2"/>
             <a:stretch>
-              <a:fillRect l="0" t="0" r="0" b="0"/>
+              <a:fillRect/>
             </a:stretch>
           </a:blipFill>
         </p:spPr>
-      </p:sp>
-      <p:sp>
-        <p:nvSpPr>
-          <p:cNvPr name="TextBox 3" id="3"/>
-          <p:cNvSpPr txBox="true"/>
+        <p:txBody>
+          <a:bodyPr/>
+          <a:lstStyle/>
+          <a:p>
+            <a:endParaRPr lang="en-US"/>
+          </a:p>
+        </p:txBody>
+      </p:sp>
+      <p:sp>
+        <p:nvSpPr>
+          <p:cNvPr id="3" name="TextBox 3"/>
+          <p:cNvSpPr txBox="1"/>
           <p:nvPr/>
         </p:nvSpPr>
         <p:spPr>
-          <a:xfrm rot="0">
+          <a:xfrm>
             <a:off x="1028700" y="1159605"/>
             <a:ext cx="17016831" cy="725551"/>
           </a:xfrm>
@@ -6358,7 +6471,7 @@
           </a:prstGeom>
         </p:spPr>
         <p:txBody>
-          <a:bodyPr anchor="t" rtlCol="false" tIns="0" lIns="0" bIns="0" rIns="0">
+          <a:bodyPr lIns="0" tIns="0" rIns="0" bIns="0" rtlCol="0" anchor="t">
             <a:spAutoFit/>
           </a:bodyPr>
           <a:lstStyle/>
@@ -6385,12 +6498,12 @@
       </p:sp>
       <p:sp>
         <p:nvSpPr>
-          <p:cNvPr name="TextBox 4" id="4"/>
-          <p:cNvSpPr txBox="true"/>
+          <p:cNvPr id="4" name="TextBox 4"/>
+          <p:cNvSpPr txBox="1"/>
           <p:nvPr/>
         </p:nvSpPr>
         <p:spPr>
-          <a:xfrm rot="0">
+          <a:xfrm>
             <a:off x="17259300" y="9210675"/>
             <a:ext cx="152400" cy="200025"/>
           </a:xfrm>
@@ -6399,7 +6512,7 @@
           </a:prstGeom>
         </p:spPr>
         <p:txBody>
-          <a:bodyPr anchor="t" rtlCol="false" tIns="0" lIns="0" bIns="0" rIns="0" wrap="none">
+          <a:bodyPr wrap="none" lIns="0" tIns="0" rIns="0" bIns="0" rtlCol="0" anchor="t">
             <a:spAutoFit/>
           </a:bodyPr>
           <a:lstStyle/>
@@ -6429,12 +6542,12 @@
       </p:sp>
       <p:grpSp>
         <p:nvGrpSpPr>
-          <p:cNvPr name="Group 5" id="5"/>
+          <p:cNvPr id="5" name="Group 5"/>
           <p:cNvGrpSpPr/>
           <p:nvPr/>
         </p:nvGrpSpPr>
         <p:grpSpPr>
-          <a:xfrm rot="0">
+          <a:xfrm>
             <a:off x="0" y="9775281"/>
             <a:ext cx="18288000" cy="725646"/>
             <a:chOff x="0" y="0"/>
@@ -6443,12 +6556,12 @@
         </p:grpSpPr>
         <p:sp>
           <p:nvSpPr>
-            <p:cNvPr name="Freeform 6" id="6"/>
+            <p:cNvPr id="6" name="Freeform 6"/>
             <p:cNvSpPr/>
             <p:nvPr/>
           </p:nvSpPr>
           <p:spPr>
-            <a:xfrm flipH="false" flipV="false" rot="0">
+            <a:xfrm>
               <a:off x="0" y="0"/>
               <a:ext cx="4816592" cy="191117"/>
             </a:xfrm>
@@ -6457,9 +6570,9 @@
               <a:gdLst/>
               <a:ahLst/>
               <a:cxnLst/>
-              <a:rect r="r" b="b" t="t" l="l"/>
+              <a:rect l="l" t="t" r="r" b="b"/>
               <a:pathLst>
-                <a:path h="191117" w="4816592">
+                <a:path w="4816592" h="191117">
                   <a:moveTo>
                     <a:pt x="0" y="0"/>
                   </a:moveTo>
@@ -6480,11 +6593,18 @@
               <a:srgbClr val="07223B"/>
             </a:solidFill>
           </p:spPr>
+          <p:txBody>
+            <a:bodyPr/>
+            <a:lstStyle/>
+            <a:p>
+              <a:endParaRPr lang="en-US"/>
+            </a:p>
+          </p:txBody>
         </p:sp>
         <p:sp>
           <p:nvSpPr>
-            <p:cNvPr name="TextBox 7" id="7"/>
-            <p:cNvSpPr txBox="true"/>
+            <p:cNvPr id="7" name="TextBox 7"/>
+            <p:cNvSpPr txBox="1"/>
             <p:nvPr/>
           </p:nvSpPr>
           <p:spPr>
@@ -6497,7 +6617,7 @@
             </a:prstGeom>
           </p:spPr>
           <p:txBody>
-            <a:bodyPr anchor="ctr" rtlCol="false" tIns="50800" lIns="50800" bIns="50800" rIns="50800"/>
+            <a:bodyPr lIns="50800" tIns="50800" rIns="50800" bIns="50800" rtlCol="0" anchor="ctr"/>
             <a:lstStyle/>
             <a:p>
               <a:pPr algn="ctr">
@@ -6505,6 +6625,7 @@
                   <a:spcPts val="2659"/>
                 </a:lnSpc>
               </a:pPr>
+              <a:endParaRPr/>
             </a:p>
           </p:txBody>
         </p:sp>
@@ -6518,7 +6639,7 @@
 </file>
 
 <file path=ppt/slides/slide7.xml><?xml version="1.0" encoding="utf-8"?>
-<p:sld xmlns:p="http://schemas.openxmlformats.org/presentationml/2006/main" xmlns:a="http://schemas.openxmlformats.org/drawingml/2006/main" xmlns:r="http://schemas.openxmlformats.org/officeDocument/2006/relationships">
+<p:sld xmlns:a="http://schemas.openxmlformats.org/drawingml/2006/main" xmlns:r="http://schemas.openxmlformats.org/officeDocument/2006/relationships" xmlns:p="http://schemas.openxmlformats.org/presentationml/2006/main">
   <p:cSld>
     <p:spTree>
       <p:nvGrpSpPr>
@@ -6536,12 +6657,12 @@
       </p:grpSpPr>
       <p:sp>
         <p:nvSpPr>
-          <p:cNvPr name="Freeform 2" id="2"/>
+          <p:cNvPr id="2" name="Freeform 2"/>
           <p:cNvSpPr/>
           <p:nvPr/>
         </p:nvSpPr>
         <p:spPr>
-          <a:xfrm flipH="false" flipV="false" rot="0">
+          <a:xfrm>
             <a:off x="2560855" y="2049756"/>
             <a:ext cx="13166290" cy="7208544"/>
           </a:xfrm>
@@ -6550,9 +6671,9 @@
             <a:gdLst/>
             <a:ahLst/>
             <a:cxnLst/>
-            <a:rect r="r" b="b" t="t" l="l"/>
+            <a:rect l="l" t="t" r="r" b="b"/>
             <a:pathLst>
-              <a:path h="7208544" w="13166290">
+              <a:path w="13166290" h="7208544">
                 <a:moveTo>
                   <a:pt x="0" y="0"/>
                 </a:moveTo>
@@ -6575,19 +6696,26 @@
           <a:blipFill>
             <a:blip r:embed="rId2"/>
             <a:stretch>
-              <a:fillRect l="0" t="0" r="0" b="0"/>
+              <a:fillRect/>
             </a:stretch>
           </a:blipFill>
         </p:spPr>
-      </p:sp>
-      <p:sp>
-        <p:nvSpPr>
-          <p:cNvPr name="TextBox 3" id="3"/>
-          <p:cNvSpPr txBox="true"/>
+        <p:txBody>
+          <a:bodyPr/>
+          <a:lstStyle/>
+          <a:p>
+            <a:endParaRPr lang="en-US"/>
+          </a:p>
+        </p:txBody>
+      </p:sp>
+      <p:sp>
+        <p:nvSpPr>
+          <p:cNvPr id="3" name="TextBox 3"/>
+          <p:cNvSpPr txBox="1"/>
           <p:nvPr/>
         </p:nvSpPr>
         <p:spPr>
-          <a:xfrm rot="0">
+          <a:xfrm>
             <a:off x="1028700" y="1159605"/>
             <a:ext cx="17016831" cy="725551"/>
           </a:xfrm>
@@ -6596,7 +6724,7 @@
           </a:prstGeom>
         </p:spPr>
         <p:txBody>
-          <a:bodyPr anchor="t" rtlCol="false" tIns="0" lIns="0" bIns="0" rIns="0">
+          <a:bodyPr lIns="0" tIns="0" rIns="0" bIns="0" rtlCol="0" anchor="t">
             <a:spAutoFit/>
           </a:bodyPr>
           <a:lstStyle/>
@@ -6623,12 +6751,12 @@
       </p:sp>
       <p:sp>
         <p:nvSpPr>
-          <p:cNvPr name="TextBox 4" id="4"/>
-          <p:cNvSpPr txBox="true"/>
+          <p:cNvPr id="4" name="TextBox 4"/>
+          <p:cNvSpPr txBox="1"/>
           <p:nvPr/>
         </p:nvSpPr>
         <p:spPr>
-          <a:xfrm rot="0">
+          <a:xfrm>
             <a:off x="17259300" y="9210675"/>
             <a:ext cx="152400" cy="200025"/>
           </a:xfrm>
@@ -6637,7 +6765,7 @@
           </a:prstGeom>
         </p:spPr>
         <p:txBody>
-          <a:bodyPr anchor="t" rtlCol="false" tIns="0" lIns="0" bIns="0" rIns="0" wrap="none">
+          <a:bodyPr wrap="none" lIns="0" tIns="0" rIns="0" bIns="0" rtlCol="0" anchor="t">
             <a:spAutoFit/>
           </a:bodyPr>
           <a:lstStyle/>
@@ -6667,12 +6795,12 @@
       </p:sp>
       <p:grpSp>
         <p:nvGrpSpPr>
-          <p:cNvPr name="Group 5" id="5"/>
+          <p:cNvPr id="5" name="Group 5"/>
           <p:cNvGrpSpPr/>
           <p:nvPr/>
         </p:nvGrpSpPr>
         <p:grpSpPr>
-          <a:xfrm rot="0">
+          <a:xfrm>
             <a:off x="0" y="9775281"/>
             <a:ext cx="18288000" cy="725646"/>
             <a:chOff x="0" y="0"/>
@@ -6681,12 +6809,12 @@
         </p:grpSpPr>
         <p:sp>
           <p:nvSpPr>
-            <p:cNvPr name="Freeform 6" id="6"/>
+            <p:cNvPr id="6" name="Freeform 6"/>
             <p:cNvSpPr/>
             <p:nvPr/>
           </p:nvSpPr>
           <p:spPr>
-            <a:xfrm flipH="false" flipV="false" rot="0">
+            <a:xfrm>
               <a:off x="0" y="0"/>
               <a:ext cx="4816592" cy="191117"/>
             </a:xfrm>
@@ -6695,9 +6823,9 @@
               <a:gdLst/>
               <a:ahLst/>
               <a:cxnLst/>
-              <a:rect r="r" b="b" t="t" l="l"/>
+              <a:rect l="l" t="t" r="r" b="b"/>
               <a:pathLst>
-                <a:path h="191117" w="4816592">
+                <a:path w="4816592" h="191117">
                   <a:moveTo>
                     <a:pt x="0" y="0"/>
                   </a:moveTo>
@@ -6718,11 +6846,18 @@
               <a:srgbClr val="07223B"/>
             </a:solidFill>
           </p:spPr>
+          <p:txBody>
+            <a:bodyPr/>
+            <a:lstStyle/>
+            <a:p>
+              <a:endParaRPr lang="en-US"/>
+            </a:p>
+          </p:txBody>
         </p:sp>
         <p:sp>
           <p:nvSpPr>
-            <p:cNvPr name="TextBox 7" id="7"/>
-            <p:cNvSpPr txBox="true"/>
+            <p:cNvPr id="7" name="TextBox 7"/>
+            <p:cNvSpPr txBox="1"/>
             <p:nvPr/>
           </p:nvSpPr>
           <p:spPr>
@@ -6735,7 +6870,7 @@
             </a:prstGeom>
           </p:spPr>
           <p:txBody>
-            <a:bodyPr anchor="ctr" rtlCol="false" tIns="50800" lIns="50800" bIns="50800" rIns="50800"/>
+            <a:bodyPr lIns="50800" tIns="50800" rIns="50800" bIns="50800" rtlCol="0" anchor="ctr"/>
             <a:lstStyle/>
             <a:p>
               <a:pPr algn="ctr">
@@ -6743,6 +6878,7 @@
                   <a:spcPts val="2659"/>
                 </a:lnSpc>
               </a:pPr>
+              <a:endParaRPr/>
             </a:p>
           </p:txBody>
         </p:sp>
@@ -6756,7 +6892,7 @@
 </file>
 
 <file path=ppt/slides/slide8.xml><?xml version="1.0" encoding="utf-8"?>
-<p:sld xmlns:p="http://schemas.openxmlformats.org/presentationml/2006/main" xmlns:a="http://schemas.openxmlformats.org/drawingml/2006/main" xmlns:r="http://schemas.openxmlformats.org/officeDocument/2006/relationships">
+<p:sld xmlns:a="http://schemas.openxmlformats.org/drawingml/2006/main" xmlns:r="http://schemas.openxmlformats.org/officeDocument/2006/relationships" xmlns:p="http://schemas.openxmlformats.org/presentationml/2006/main">
   <p:cSld>
     <p:spTree>
       <p:nvGrpSpPr>
@@ -6774,12 +6910,12 @@
       </p:grpSpPr>
       <p:sp>
         <p:nvSpPr>
-          <p:cNvPr name="Freeform 2" id="2"/>
+          <p:cNvPr id="2" name="Freeform 2"/>
           <p:cNvSpPr/>
           <p:nvPr/>
         </p:nvSpPr>
         <p:spPr>
-          <a:xfrm flipH="false" flipV="false" rot="0">
+          <a:xfrm>
             <a:off x="3128647" y="2241028"/>
             <a:ext cx="12816936" cy="7017272"/>
           </a:xfrm>
@@ -6788,9 +6924,9 @@
             <a:gdLst/>
             <a:ahLst/>
             <a:cxnLst/>
-            <a:rect r="r" b="b" t="t" l="l"/>
+            <a:rect l="l" t="t" r="r" b="b"/>
             <a:pathLst>
-              <a:path h="7017272" w="12816936">
+              <a:path w="12816936" h="7017272">
                 <a:moveTo>
                   <a:pt x="0" y="0"/>
                 </a:moveTo>
@@ -6813,19 +6949,26 @@
           <a:blipFill>
             <a:blip r:embed="rId2"/>
             <a:stretch>
-              <a:fillRect l="0" t="0" r="0" b="0"/>
+              <a:fillRect/>
             </a:stretch>
           </a:blipFill>
         </p:spPr>
-      </p:sp>
-      <p:sp>
-        <p:nvSpPr>
-          <p:cNvPr name="TextBox 3" id="3"/>
-          <p:cNvSpPr txBox="true"/>
+        <p:txBody>
+          <a:bodyPr/>
+          <a:lstStyle/>
+          <a:p>
+            <a:endParaRPr lang="en-US"/>
+          </a:p>
+        </p:txBody>
+      </p:sp>
+      <p:sp>
+        <p:nvSpPr>
+          <p:cNvPr id="3" name="TextBox 3"/>
+          <p:cNvSpPr txBox="1"/>
           <p:nvPr/>
         </p:nvSpPr>
         <p:spPr>
-          <a:xfrm rot="0">
+          <a:xfrm>
             <a:off x="1028700" y="1159605"/>
             <a:ext cx="17016831" cy="725551"/>
           </a:xfrm>
@@ -6834,7 +6977,7 @@
           </a:prstGeom>
         </p:spPr>
         <p:txBody>
-          <a:bodyPr anchor="t" rtlCol="false" tIns="0" lIns="0" bIns="0" rIns="0">
+          <a:bodyPr lIns="0" tIns="0" rIns="0" bIns="0" rtlCol="0" anchor="t">
             <a:spAutoFit/>
           </a:bodyPr>
           <a:lstStyle/>
@@ -6861,12 +7004,12 @@
       </p:sp>
       <p:sp>
         <p:nvSpPr>
-          <p:cNvPr name="TextBox 4" id="4"/>
-          <p:cNvSpPr txBox="true"/>
+          <p:cNvPr id="4" name="TextBox 4"/>
+          <p:cNvSpPr txBox="1"/>
           <p:nvPr/>
         </p:nvSpPr>
         <p:spPr>
-          <a:xfrm rot="0">
+          <a:xfrm>
             <a:off x="17259300" y="9210675"/>
             <a:ext cx="152400" cy="200025"/>
           </a:xfrm>
@@ -6875,7 +7018,7 @@
           </a:prstGeom>
         </p:spPr>
         <p:txBody>
-          <a:bodyPr anchor="t" rtlCol="false" tIns="0" lIns="0" bIns="0" rIns="0" wrap="none">
+          <a:bodyPr wrap="none" lIns="0" tIns="0" rIns="0" bIns="0" rtlCol="0" anchor="t">
             <a:spAutoFit/>
           </a:bodyPr>
           <a:lstStyle/>
@@ -6905,12 +7048,12 @@
       </p:sp>
       <p:grpSp>
         <p:nvGrpSpPr>
-          <p:cNvPr name="Group 5" id="5"/>
+          <p:cNvPr id="5" name="Group 5"/>
           <p:cNvGrpSpPr/>
           <p:nvPr/>
         </p:nvGrpSpPr>
         <p:grpSpPr>
-          <a:xfrm rot="0">
+          <a:xfrm>
             <a:off x="0" y="9775281"/>
             <a:ext cx="18288000" cy="725646"/>
             <a:chOff x="0" y="0"/>
@@ -6919,12 +7062,12 @@
         </p:grpSpPr>
         <p:sp>
           <p:nvSpPr>
-            <p:cNvPr name="Freeform 6" id="6"/>
+            <p:cNvPr id="6" name="Freeform 6"/>
             <p:cNvSpPr/>
             <p:nvPr/>
           </p:nvSpPr>
           <p:spPr>
-            <a:xfrm flipH="false" flipV="false" rot="0">
+            <a:xfrm>
               <a:off x="0" y="0"/>
               <a:ext cx="4816592" cy="191117"/>
             </a:xfrm>
@@ -6933,9 +7076,9 @@
               <a:gdLst/>
               <a:ahLst/>
               <a:cxnLst/>
-              <a:rect r="r" b="b" t="t" l="l"/>
+              <a:rect l="l" t="t" r="r" b="b"/>
               <a:pathLst>
-                <a:path h="191117" w="4816592">
+                <a:path w="4816592" h="191117">
                   <a:moveTo>
                     <a:pt x="0" y="0"/>
                   </a:moveTo>
@@ -6956,11 +7099,18 @@
               <a:srgbClr val="07223B"/>
             </a:solidFill>
           </p:spPr>
+          <p:txBody>
+            <a:bodyPr/>
+            <a:lstStyle/>
+            <a:p>
+              <a:endParaRPr lang="en-US"/>
+            </a:p>
+          </p:txBody>
         </p:sp>
         <p:sp>
           <p:nvSpPr>
-            <p:cNvPr name="TextBox 7" id="7"/>
-            <p:cNvSpPr txBox="true"/>
+            <p:cNvPr id="7" name="TextBox 7"/>
+            <p:cNvSpPr txBox="1"/>
             <p:nvPr/>
           </p:nvSpPr>
           <p:spPr>
@@ -6973,7 +7123,7 @@
             </a:prstGeom>
           </p:spPr>
           <p:txBody>
-            <a:bodyPr anchor="ctr" rtlCol="false" tIns="50800" lIns="50800" bIns="50800" rIns="50800"/>
+            <a:bodyPr lIns="50800" tIns="50800" rIns="50800" bIns="50800" rtlCol="0" anchor="ctr"/>
             <a:lstStyle/>
             <a:p>
               <a:pPr algn="ctr">
@@ -6981,6 +7131,7 @@
                   <a:spcPts val="2659"/>
                 </a:lnSpc>
               </a:pPr>
+              <a:endParaRPr/>
             </a:p>
           </p:txBody>
         </p:sp>
@@ -6994,7 +7145,7 @@
 </file>
 
 <file path=ppt/slides/slide9.xml><?xml version="1.0" encoding="utf-8"?>
-<p:sld xmlns:p="http://schemas.openxmlformats.org/presentationml/2006/main" xmlns:a="http://schemas.openxmlformats.org/drawingml/2006/main" xmlns:r="http://schemas.openxmlformats.org/officeDocument/2006/relationships">
+<p:sld xmlns:a="http://schemas.openxmlformats.org/drawingml/2006/main" xmlns:r="http://schemas.openxmlformats.org/officeDocument/2006/relationships" xmlns:p="http://schemas.openxmlformats.org/presentationml/2006/main">
   <p:cSld>
     <p:spTree>
       <p:nvGrpSpPr>
@@ -7012,12 +7163,12 @@
       </p:grpSpPr>
       <p:sp>
         <p:nvSpPr>
-          <p:cNvPr name="Freeform 2" id="2"/>
+          <p:cNvPr id="2" name="Freeform 2"/>
           <p:cNvSpPr/>
           <p:nvPr/>
         </p:nvSpPr>
         <p:spPr>
-          <a:xfrm flipH="false" flipV="false" rot="0">
+          <a:xfrm>
             <a:off x="3093696" y="2784571"/>
             <a:ext cx="12100608" cy="6625083"/>
           </a:xfrm>
@@ -7026,9 +7177,9 @@
             <a:gdLst/>
             <a:ahLst/>
             <a:cxnLst/>
-            <a:rect r="r" b="b" t="t" l="l"/>
+            <a:rect l="l" t="t" r="r" b="b"/>
             <a:pathLst>
-              <a:path h="6625083" w="12100608">
+              <a:path w="12100608" h="6625083">
                 <a:moveTo>
                   <a:pt x="0" y="0"/>
                 </a:moveTo>
@@ -7051,19 +7202,26 @@
           <a:blipFill>
             <a:blip r:embed="rId2"/>
             <a:stretch>
-              <a:fillRect l="0" t="0" r="0" b="0"/>
+              <a:fillRect/>
             </a:stretch>
           </a:blipFill>
         </p:spPr>
-      </p:sp>
-      <p:sp>
-        <p:nvSpPr>
-          <p:cNvPr name="TextBox 3" id="3"/>
-          <p:cNvSpPr txBox="true"/>
+        <p:txBody>
+          <a:bodyPr/>
+          <a:lstStyle/>
+          <a:p>
+            <a:endParaRPr lang="en-US"/>
+          </a:p>
+        </p:txBody>
+      </p:sp>
+      <p:sp>
+        <p:nvSpPr>
+          <p:cNvPr id="3" name="TextBox 3"/>
+          <p:cNvSpPr txBox="1"/>
           <p:nvPr/>
         </p:nvSpPr>
         <p:spPr>
-          <a:xfrm rot="0">
+          <a:xfrm>
             <a:off x="1028700" y="1159605"/>
             <a:ext cx="17016831" cy="725551"/>
           </a:xfrm>
@@ -7072,7 +7230,7 @@
           </a:prstGeom>
         </p:spPr>
         <p:txBody>
-          <a:bodyPr anchor="t" rtlCol="false" tIns="0" lIns="0" bIns="0" rIns="0">
+          <a:bodyPr lIns="0" tIns="0" rIns="0" bIns="0" rtlCol="0" anchor="t">
             <a:spAutoFit/>
           </a:bodyPr>
           <a:lstStyle/>
@@ -7099,13 +7257,13 @@
       </p:sp>
       <p:sp>
         <p:nvSpPr>
-          <p:cNvPr name="TextBox 4" id="4"/>
-          <p:cNvSpPr txBox="true"/>
+          <p:cNvPr id="4" name="TextBox 4"/>
+          <p:cNvSpPr txBox="1"/>
           <p:nvPr/>
         </p:nvSpPr>
         <p:spPr>
-          <a:xfrm rot="0">
-            <a:off x="10290657" y="473390"/>
+          <a:xfrm>
+            <a:off x="9537115" y="408332"/>
             <a:ext cx="7309209" cy="1926532"/>
           </a:xfrm>
           <a:prstGeom prst="rect">
@@ -7113,7 +7271,7 @@
           </a:prstGeom>
         </p:spPr>
         <p:txBody>
-          <a:bodyPr anchor="t" rtlCol="false" tIns="0" lIns="0" bIns="0" rIns="0">
+          <a:bodyPr lIns="0" tIns="0" rIns="0" bIns="0" rtlCol="0" anchor="t">
             <a:spAutoFit/>
           </a:bodyPr>
           <a:lstStyle/>
@@ -7127,7 +7285,7 @@
               </a:spcBef>
             </a:pPr>
             <a:r>
-              <a:rPr lang="en-US" b="true" sz="2186">
+              <a:rPr lang="en-US" sz="2186" b="1" dirty="0">
                 <a:solidFill>
                   <a:srgbClr val="5170FF"/>
                 </a:solidFill>
@@ -7149,7 +7307,7 @@
               </a:spcBef>
             </a:pPr>
             <a:r>
-              <a:rPr lang="en-US" b="true" sz="2186">
+              <a:rPr lang="en-US" sz="2186" b="1" dirty="0">
                 <a:solidFill>
                   <a:srgbClr val="5170FF"/>
                 </a:solidFill>
@@ -7171,7 +7329,7 @@
               </a:spcBef>
             </a:pPr>
             <a:r>
-              <a:rPr lang="en-US" b="true" sz="2186">
+              <a:rPr lang="en-US" sz="2186" b="1" dirty="0">
                 <a:solidFill>
                   <a:srgbClr val="5170FF"/>
                 </a:solidFill>
@@ -7193,7 +7351,7 @@
               </a:spcBef>
             </a:pPr>
             <a:r>
-              <a:rPr lang="en-US" b="true" sz="2186">
+              <a:rPr lang="en-US" sz="2186" b="1" dirty="0">
                 <a:solidFill>
                   <a:srgbClr val="5170FF"/>
                 </a:solidFill>
@@ -7215,7 +7373,7 @@
               </a:spcBef>
             </a:pPr>
             <a:r>
-              <a:rPr lang="en-US" b="true" sz="2186">
+              <a:rPr lang="en-US" sz="2186" b="1" dirty="0">
                 <a:solidFill>
                   <a:srgbClr val="5170FF"/>
                 </a:solidFill>
@@ -7231,12 +7389,12 @@
       </p:sp>
       <p:sp>
         <p:nvSpPr>
-          <p:cNvPr name="TextBox 5" id="5"/>
-          <p:cNvSpPr txBox="true"/>
+          <p:cNvPr id="5" name="TextBox 5"/>
+          <p:cNvSpPr txBox="1"/>
           <p:nvPr/>
         </p:nvSpPr>
         <p:spPr>
-          <a:xfrm rot="0">
+          <a:xfrm>
             <a:off x="17259300" y="9210675"/>
             <a:ext cx="152400" cy="200025"/>
           </a:xfrm>
@@ -7245,7 +7403,7 @@
           </a:prstGeom>
         </p:spPr>
         <p:txBody>
-          <a:bodyPr anchor="t" rtlCol="false" tIns="0" lIns="0" bIns="0" rIns="0" wrap="none">
+          <a:bodyPr wrap="none" lIns="0" tIns="0" rIns="0" bIns="0" rtlCol="0" anchor="t">
             <a:spAutoFit/>
           </a:bodyPr>
           <a:lstStyle/>
@@ -7275,12 +7433,12 @@
       </p:sp>
       <p:grpSp>
         <p:nvGrpSpPr>
-          <p:cNvPr name="Group 6" id="6"/>
+          <p:cNvPr id="6" name="Group 6"/>
           <p:cNvGrpSpPr/>
           <p:nvPr/>
         </p:nvGrpSpPr>
         <p:grpSpPr>
-          <a:xfrm rot="0">
+          <a:xfrm>
             <a:off x="0" y="9775281"/>
             <a:ext cx="18288000" cy="725646"/>
             <a:chOff x="0" y="0"/>
@@ -7289,12 +7447,12 @@
         </p:grpSpPr>
         <p:sp>
           <p:nvSpPr>
-            <p:cNvPr name="Freeform 7" id="7"/>
+            <p:cNvPr id="7" name="Freeform 7"/>
             <p:cNvSpPr/>
             <p:nvPr/>
           </p:nvSpPr>
           <p:spPr>
-            <a:xfrm flipH="false" flipV="false" rot="0">
+            <a:xfrm>
               <a:off x="0" y="0"/>
               <a:ext cx="4816592" cy="191117"/>
             </a:xfrm>
@@ -7303,9 +7461,9 @@
               <a:gdLst/>
               <a:ahLst/>
               <a:cxnLst/>
-              <a:rect r="r" b="b" t="t" l="l"/>
+              <a:rect l="l" t="t" r="r" b="b"/>
               <a:pathLst>
-                <a:path h="191117" w="4816592">
+                <a:path w="4816592" h="191117">
                   <a:moveTo>
                     <a:pt x="0" y="0"/>
                   </a:moveTo>
@@ -7326,11 +7484,18 @@
               <a:srgbClr val="07223B"/>
             </a:solidFill>
           </p:spPr>
+          <p:txBody>
+            <a:bodyPr/>
+            <a:lstStyle/>
+            <a:p>
+              <a:endParaRPr lang="en-US"/>
+            </a:p>
+          </p:txBody>
         </p:sp>
         <p:sp>
           <p:nvSpPr>
-            <p:cNvPr name="TextBox 8" id="8"/>
-            <p:cNvSpPr txBox="true"/>
+            <p:cNvPr id="8" name="TextBox 8"/>
+            <p:cNvSpPr txBox="1"/>
             <p:nvPr/>
           </p:nvSpPr>
           <p:spPr>
@@ -7343,7 +7508,7 @@
             </a:prstGeom>
           </p:spPr>
           <p:txBody>
-            <a:bodyPr anchor="ctr" rtlCol="false" tIns="50800" lIns="50800" bIns="50800" rIns="50800"/>
+            <a:bodyPr lIns="50800" tIns="50800" rIns="50800" bIns="50800" rtlCol="0" anchor="ctr"/>
             <a:lstStyle/>
             <a:p>
               <a:pPr algn="ctr">
@@ -7351,6 +7516,7 @@
                   <a:spcPts val="2659"/>
                 </a:lnSpc>
               </a:pPr>
+              <a:endParaRPr/>
             </a:p>
           </p:txBody>
         </p:sp>
